--- a/Uge41ColorsBackgrounds.pptx
+++ b/Uge41ColorsBackgrounds.pptx
@@ -5,7 +5,7 @@
     <p:sldMasterId id="2147483648" r:id="rId1"/>
   </p:sldMasterIdLst>
   <p:notesMasterIdLst>
-    <p:notesMasterId r:id="rId32"/>
+    <p:notesMasterId r:id="rId26"/>
   </p:notesMasterIdLst>
   <p:sldIdLst>
     <p:sldId id="256" r:id="rId2"/>
@@ -19,25 +19,19 @@
     <p:sldId id="264" r:id="rId10"/>
     <p:sldId id="265" r:id="rId11"/>
     <p:sldId id="266" r:id="rId12"/>
-    <p:sldId id="267" r:id="rId13"/>
-    <p:sldId id="268" r:id="rId14"/>
-    <p:sldId id="269" r:id="rId15"/>
-    <p:sldId id="270" r:id="rId16"/>
-    <p:sldId id="271" r:id="rId17"/>
-    <p:sldId id="272" r:id="rId18"/>
-    <p:sldId id="273" r:id="rId19"/>
-    <p:sldId id="274" r:id="rId20"/>
-    <p:sldId id="275" r:id="rId21"/>
-    <p:sldId id="276" r:id="rId22"/>
-    <p:sldId id="277" r:id="rId23"/>
-    <p:sldId id="278" r:id="rId24"/>
-    <p:sldId id="279" r:id="rId25"/>
-    <p:sldId id="280" r:id="rId26"/>
-    <p:sldId id="281" r:id="rId27"/>
-    <p:sldId id="282" r:id="rId28"/>
-    <p:sldId id="283" r:id="rId29"/>
-    <p:sldId id="284" r:id="rId30"/>
-    <p:sldId id="285" r:id="rId31"/>
+    <p:sldId id="269" r:id="rId13"/>
+    <p:sldId id="270" r:id="rId14"/>
+    <p:sldId id="271" r:id="rId15"/>
+    <p:sldId id="273" r:id="rId16"/>
+    <p:sldId id="274" r:id="rId17"/>
+    <p:sldId id="275" r:id="rId18"/>
+    <p:sldId id="276" r:id="rId19"/>
+    <p:sldId id="277" r:id="rId20"/>
+    <p:sldId id="281" r:id="rId21"/>
+    <p:sldId id="282" r:id="rId22"/>
+    <p:sldId id="283" r:id="rId23"/>
+    <p:sldId id="284" r:id="rId24"/>
+    <p:sldId id="285" r:id="rId25"/>
   </p:sldIdLst>
   <p:sldSz cx="13004800" cy="9753600"/>
   <p:notesSz cx="6858000" cy="9144000"/>
@@ -339,6 +333,11 @@
       </a:defRPr>
     </a:lvl9pPr>
   </p:defaultTextStyle>
+  <p:extLst>
+    <p:ext uri="{EFAFB233-063F-42B5-8137-9DF3F51BA10A}">
+      <p15:sldGuideLst xmlns:p15="http://schemas.microsoft.com/office/powerpoint/2012/main"/>
+    </p:ext>
+  </p:extLst>
 </p:presentation>
 </file>
 
@@ -1661,7 +1660,7 @@
           </a:ln>
           <a:extLst>
             <a:ext uri="{C572A759-6A51-4108-AA02-DFA0A04FC94B}">
-              <ma14:wrappingTextBoxFlag xmlns:ma14="http://schemas.microsoft.com/office/mac/drawingml/2011/main" xmlns:a14="http://schemas.microsoft.com/office/drawing/2010/main" xmlns:m="http://schemas.openxmlformats.org/officeDocument/2006/math" xmlns="" val="1"/>
+              <ma14:wrappingTextBoxFlag xmlns="" xmlns:m="http://schemas.openxmlformats.org/officeDocument/2006/math" xmlns:a14="http://schemas.microsoft.com/office/drawing/2010/main" xmlns:ma14="http://schemas.microsoft.com/office/mac/drawingml/2011/main" val="1"/>
             </a:ext>
           </a:extLst>
         </p:spPr>
@@ -1812,7 +1811,7 @@
           </a:ln>
           <a:extLst>
             <a:ext uri="{C572A759-6A51-4108-AA02-DFA0A04FC94B}">
-              <ma14:wrappingTextBoxFlag xmlns:ma14="http://schemas.microsoft.com/office/mac/drawingml/2011/main" xmlns:a14="http://schemas.microsoft.com/office/drawing/2010/main" xmlns:m="http://schemas.openxmlformats.org/officeDocument/2006/math" xmlns="" val="1"/>
+              <ma14:wrappingTextBoxFlag xmlns="" xmlns:m="http://schemas.openxmlformats.org/officeDocument/2006/math" xmlns:a14="http://schemas.microsoft.com/office/drawing/2010/main" xmlns:ma14="http://schemas.microsoft.com/office/mac/drawingml/2011/main" val="1"/>
             </a:ext>
           </a:extLst>
         </p:spPr>
@@ -1851,7 +1850,7 @@
           </a:ln>
           <a:extLst>
             <a:ext uri="{C572A759-6A51-4108-AA02-DFA0A04FC94B}">
-              <ma14:wrappingTextBoxFlag xmlns:ma14="http://schemas.microsoft.com/office/mac/drawingml/2011/main" xmlns:a14="http://schemas.microsoft.com/office/drawing/2010/main" xmlns:m="http://schemas.openxmlformats.org/officeDocument/2006/math" xmlns="" val="1"/>
+              <ma14:wrappingTextBoxFlag xmlns="" xmlns:m="http://schemas.openxmlformats.org/officeDocument/2006/math" xmlns:a14="http://schemas.microsoft.com/office/drawing/2010/main" xmlns:ma14="http://schemas.microsoft.com/office/mac/drawingml/2011/main" val="1"/>
             </a:ext>
           </a:extLst>
         </p:spPr>
@@ -2706,18 +2705,18 @@
               </a:defRPr>
             </a:pPr>
             <a:r>
-              <a:rPr sz="9000" b="1">
+              <a:rPr lang="da-DK" sz="9000" b="1" dirty="0">
                 <a:solidFill>
                   <a:srgbClr val="3D71B8"/>
                 </a:solidFill>
               </a:rPr>
-              <a:t>13</a:t>
+              <a:t>CSS</a:t>
             </a:r>
             <a:br>
-              <a:rPr sz="4000"/>
+              <a:rPr sz="4000" dirty="0"/>
             </a:br>
             <a:r>
-              <a:rPr sz="6000">
+              <a:rPr sz="6000" dirty="0">
                 <a:latin typeface="+mn-lt"/>
                 <a:ea typeface="+mn-ea"/>
                 <a:cs typeface="+mn-cs"/>
@@ -2946,7 +2945,7 @@
           </a:ln>
           <a:extLst>
             <a:ext uri="{C572A759-6A51-4108-AA02-DFA0A04FC94B}">
-              <ma14:wrappingTextBoxFlag xmlns:ma14="http://schemas.microsoft.com/office/mac/drawingml/2011/main" xmlns:a14="http://schemas.microsoft.com/office/drawing/2010/main" xmlns:m="http://schemas.openxmlformats.org/officeDocument/2006/math" xmlns="" val="1"/>
+              <ma14:wrappingTextBoxFlag xmlns="" xmlns:m="http://schemas.openxmlformats.org/officeDocument/2006/math" xmlns:a14="http://schemas.microsoft.com/office/drawing/2010/main" xmlns:ma14="http://schemas.microsoft.com/office/mac/drawingml/2011/main" val="1"/>
             </a:ext>
           </a:extLst>
         </p:spPr>
@@ -2976,304 +2975,6 @@
 </file>
 
 <file path=ppt/slides/slide12.xml><?xml version="1.0" encoding="utf-8"?>
-<p:sld xmlns:a="http://schemas.openxmlformats.org/drawingml/2006/main" xmlns:r="http://schemas.openxmlformats.org/officeDocument/2006/relationships" xmlns:p="http://schemas.openxmlformats.org/presentationml/2006/main">
-  <p:cSld>
-    <p:spTree>
-      <p:nvGrpSpPr>
-        <p:cNvPr id="1" name=""/>
-        <p:cNvGrpSpPr/>
-        <p:nvPr/>
-      </p:nvGrpSpPr>
-      <p:grpSpPr>
-        <a:xfrm>
-          <a:off x="0" y="0"/>
-          <a:ext cx="0" cy="0"/>
-          <a:chOff x="0" y="0"/>
-          <a:chExt cx="0" cy="0"/>
-        </a:xfrm>
-      </p:grpSpPr>
-      <p:sp>
-        <p:nvSpPr>
-          <p:cNvPr id="125" name="OKLCH"/>
-          <p:cNvSpPr txBox="1">
-            <a:spLocks noGrp="1"/>
-          </p:cNvSpPr>
-          <p:nvPr>
-            <p:ph type="title"/>
-          </p:nvPr>
-        </p:nvSpPr>
-        <p:spPr>
-          <a:prstGeom prst="rect">
-            <a:avLst/>
-          </a:prstGeom>
-        </p:spPr>
-        <p:txBody>
-          <a:bodyPr/>
-          <a:lstStyle/>
-          <a:p>
-            <a:r>
-              <a:t>OKLCH</a:t>
-            </a:r>
-          </a:p>
-        </p:txBody>
-      </p:sp>
-      <p:sp>
-        <p:nvSpPr>
-          <p:cNvPr id="126" name="Colors described by values for perceived lightness (%), chroma (from 0.0 to 0.37), and hue (0deg to 360deg):…"/>
-          <p:cNvSpPr txBox="1">
-            <a:spLocks noGrp="1"/>
-          </p:cNvSpPr>
-          <p:nvPr>
-            <p:ph type="body" idx="1"/>
-          </p:nvPr>
-        </p:nvSpPr>
-        <p:spPr>
-          <a:prstGeom prst="rect">
-            <a:avLst/>
-          </a:prstGeom>
-        </p:spPr>
-        <p:txBody>
-          <a:bodyPr anchor="t"/>
-          <a:lstStyle/>
-          <a:p>
-            <a:pPr>
-              <a:defRPr sz="3000"/>
-            </a:pPr>
-            <a:r>
-              <a:t>Colors described by values for </a:t>
-            </a:r>
-            <a:r>
-              <a:rPr b="1">
-                <a:latin typeface="+mj-lt"/>
-                <a:ea typeface="+mj-ea"/>
-                <a:cs typeface="+mj-cs"/>
-                <a:sym typeface="Helvetica"/>
-              </a:rPr>
-              <a:t>perceived lightness</a:t>
-            </a:r>
-            <a:r>
-              <a:t> (%), </a:t>
-            </a:r>
-            <a:r>
-              <a:rPr b="1">
-                <a:latin typeface="+mj-lt"/>
-                <a:ea typeface="+mj-ea"/>
-                <a:cs typeface="+mj-cs"/>
-                <a:sym typeface="Helvetica"/>
-              </a:rPr>
-              <a:t>chroma</a:t>
-            </a:r>
-            <a:r>
-              <a:t> (from 0.0 to 0.37), and </a:t>
-            </a:r>
-            <a:r>
-              <a:rPr b="1">
-                <a:latin typeface="+mj-lt"/>
-                <a:ea typeface="+mj-ea"/>
-                <a:cs typeface="+mj-cs"/>
-                <a:sym typeface="Helvetica"/>
-              </a:rPr>
-              <a:t>hue</a:t>
-            </a:r>
-            <a:r>
-              <a:t> (0deg to 360deg):</a:t>
-            </a:r>
-          </a:p>
-          <a:p>
-            <a:pPr marL="0" indent="0" algn="ctr">
-              <a:spcBef>
-                <a:spcPts val="1200"/>
-              </a:spcBef>
-              <a:buSzTx/>
-              <a:buNone/>
-              <a:defRPr sz="3000">
-                <a:latin typeface="Courier"/>
-                <a:ea typeface="Courier"/>
-                <a:cs typeface="Courier"/>
-                <a:sym typeface="Courier"/>
-              </a:defRPr>
-            </a:pPr>
-            <a:r>
-              <a:rPr b="1">
-                <a:solidFill>
-                  <a:schemeClr val="accent4">
-                    <a:hueOff val="384618"/>
-                    <a:satOff val="3869"/>
-                    <a:lumOff val="5802"/>
-                  </a:schemeClr>
-                </a:solidFill>
-              </a:rPr>
-              <a:t>oklch(79.96% 0.076 304.01)</a:t>
-            </a:r>
-          </a:p>
-          <a:p>
-            <a:pPr>
-              <a:defRPr sz="3000"/>
-            </a:pPr>
-            <a:r>
-              <a:t>Provides the ability to access the brighter colors on high dynamic range (HDR) monitors</a:t>
-            </a:r>
-          </a:p>
-          <a:p>
-            <a:pPr>
-              <a:defRPr sz="3000"/>
-            </a:pPr>
-            <a:r>
-              <a:t>Not as well supported as RGB and HSL</a:t>
-            </a:r>
-          </a:p>
-        </p:txBody>
-      </p:sp>
-    </p:spTree>
-  </p:cSld>
-  <p:clrMapOvr>
-    <a:masterClrMapping/>
-  </p:clrMapOvr>
-  <p:transition spd="med"/>
-</p:sld>
-</file>
-
-<file path=ppt/slides/slide13.xml><?xml version="1.0" encoding="utf-8"?>
-<p:sld xmlns:a="http://schemas.openxmlformats.org/drawingml/2006/main" xmlns:r="http://schemas.openxmlformats.org/officeDocument/2006/relationships" xmlns:p="http://schemas.openxmlformats.org/presentationml/2006/main">
-  <p:cSld>
-    <p:spTree>
-      <p:nvGrpSpPr>
-        <p:cNvPr id="1" name=""/>
-        <p:cNvGrpSpPr/>
-        <p:nvPr/>
-      </p:nvGrpSpPr>
-      <p:grpSpPr>
-        <a:xfrm>
-          <a:off x="0" y="0"/>
-          <a:ext cx="0" cy="0"/>
-          <a:chOff x="0" y="0"/>
-          <a:chExt cx="0" cy="0"/>
-        </a:xfrm>
-      </p:grpSpPr>
-      <p:sp>
-        <p:nvSpPr>
-          <p:cNvPr id="128" name="OKLCH, continued"/>
-          <p:cNvSpPr txBox="1">
-            <a:spLocks noGrp="1"/>
-          </p:cNvSpPr>
-          <p:nvPr>
-            <p:ph type="title"/>
-          </p:nvPr>
-        </p:nvSpPr>
-        <p:spPr>
-          <a:xfrm>
-            <a:off x="999579" y="457200"/>
-            <a:ext cx="11099801" cy="1222227"/>
-          </a:xfrm>
-          <a:prstGeom prst="rect">
-            <a:avLst/>
-          </a:prstGeom>
-        </p:spPr>
-        <p:txBody>
-          <a:bodyPr/>
-          <a:lstStyle>
-            <a:lvl1pPr>
-              <a:defRPr sz="3600"/>
-            </a:lvl1pPr>
-          </a:lstStyle>
-          <a:p>
-            <a:r>
-              <a:t>OKLCH, continued</a:t>
-            </a:r>
-          </a:p>
-        </p:txBody>
-      </p:sp>
-      <p:sp>
-        <p:nvSpPr>
-          <p:cNvPr id="129" name="The OKLCH color picker (oklch.com)"/>
-          <p:cNvSpPr txBox="1"/>
-          <p:nvPr/>
-        </p:nvSpPr>
-        <p:spPr>
-          <a:xfrm>
-            <a:off x="3926248" y="2069302"/>
-            <a:ext cx="5246463" cy="469906"/>
-          </a:xfrm>
-          <a:prstGeom prst="rect">
-            <a:avLst/>
-          </a:prstGeom>
-          <a:ln w="12700">
-            <a:miter lim="400000"/>
-          </a:ln>
-          <a:extLst>
-            <a:ext uri="{C572A759-6A51-4108-AA02-DFA0A04FC94B}">
-              <ma14:wrappingTextBoxFlag xmlns:ma14="http://schemas.microsoft.com/office/mac/drawingml/2011/main" xmlns:a14="http://schemas.microsoft.com/office/drawing/2010/main" xmlns:m="http://schemas.openxmlformats.org/officeDocument/2006/math" xmlns="" val="1"/>
-            </a:ext>
-          </a:extLst>
-        </p:spPr>
-        <p:txBody>
-          <a:bodyPr wrap="none" lIns="50800" tIns="50800" rIns="50800" bIns="50800" anchor="ctr">
-            <a:spAutoFit/>
-          </a:bodyPr>
-          <a:lstStyle/>
-          <a:p>
-            <a:pPr>
-              <a:defRPr sz="2400"/>
-            </a:pPr>
-            <a:r>
-              <a:t>The OKLCH color picker (</a:t>
-            </a:r>
-            <a:r>
-              <a:rPr b="1" u="sng">
-                <a:solidFill>
-                  <a:schemeClr val="accent1"/>
-                </a:solidFill>
-                <a:latin typeface="+mj-lt"/>
-                <a:ea typeface="+mj-ea"/>
-                <a:cs typeface="+mj-cs"/>
-                <a:sym typeface="Helvetica"/>
-                <a:hlinkClick r:id="rId2"/>
-              </a:rPr>
-              <a:t>oklch.com</a:t>
-            </a:r>
-            <a:r>
-              <a:t>)</a:t>
-            </a:r>
-          </a:p>
-        </p:txBody>
-      </p:sp>
-      <p:pic>
-        <p:nvPicPr>
-          <p:cNvPr id="130" name="lwd6_1309_oklch.png" descr="lwd6_1309_oklch.png"/>
-          <p:cNvPicPr>
-            <a:picLocks noChangeAspect="1"/>
-          </p:cNvPicPr>
-          <p:nvPr/>
-        </p:nvPicPr>
-        <p:blipFill>
-          <a:blip r:embed="rId3"/>
-          <a:stretch>
-            <a:fillRect/>
-          </a:stretch>
-        </p:blipFill>
-        <p:spPr>
-          <a:xfrm>
-            <a:off x="1780957" y="2929084"/>
-            <a:ext cx="9537045" cy="5174809"/>
-          </a:xfrm>
-          <a:prstGeom prst="rect">
-            <a:avLst/>
-          </a:prstGeom>
-          <a:ln w="12700">
-            <a:miter lim="400000"/>
-          </a:ln>
-        </p:spPr>
-      </p:pic>
-    </p:spTree>
-  </p:cSld>
-  <p:clrMapOvr>
-    <a:masterClrMapping/>
-  </p:clrMapOvr>
-  <p:transition spd="med"/>
-</p:sld>
-</file>
-
-<file path=ppt/slides/slide14.xml><?xml version="1.0" encoding="utf-8"?>
 <p:sld xmlns:a="http://schemas.openxmlformats.org/drawingml/2006/main" xmlns:r="http://schemas.openxmlformats.org/officeDocument/2006/relationships" xmlns:p="http://schemas.openxmlformats.org/presentationml/2006/main">
   <p:cSld>
     <p:spTree>
@@ -3520,7 +3221,7 @@
 </p:sld>
 </file>
 
-<file path=ppt/slides/slide15.xml><?xml version="1.0" encoding="utf-8"?>
+<file path=ppt/slides/slide13.xml><?xml version="1.0" encoding="utf-8"?>
 <p:sld xmlns:a="http://schemas.openxmlformats.org/drawingml/2006/main" xmlns:r="http://schemas.openxmlformats.org/officeDocument/2006/relationships" xmlns:p="http://schemas.openxmlformats.org/presentationml/2006/main">
   <p:cSld>
     <p:spTree>
@@ -3762,7 +3463,7 @@
 </p:sld>
 </file>
 
-<file path=ppt/slides/slide16.xml><?xml version="1.0" encoding="utf-8"?>
+<file path=ppt/slides/slide14.xml><?xml version="1.0" encoding="utf-8"?>
 <p:sld xmlns:a="http://schemas.openxmlformats.org/drawingml/2006/main" xmlns:r="http://schemas.openxmlformats.org/officeDocument/2006/relationships" xmlns:p="http://schemas.openxmlformats.org/presentationml/2006/main">
   <p:cSld>
     <p:spTree>
@@ -4017,213 +3718,7 @@
 </p:sld>
 </file>
 
-<file path=ppt/slides/slide17.xml><?xml version="1.0" encoding="utf-8"?>
-<p:sld xmlns:a="http://schemas.openxmlformats.org/drawingml/2006/main" xmlns:r="http://schemas.openxmlformats.org/officeDocument/2006/relationships" xmlns:p="http://schemas.openxmlformats.org/presentationml/2006/main">
-  <p:cSld>
-    <p:spTree>
-      <p:nvGrpSpPr>
-        <p:cNvPr id="1" name=""/>
-        <p:cNvGrpSpPr/>
-        <p:nvPr/>
-      </p:nvGrpSpPr>
-      <p:grpSpPr>
-        <a:xfrm>
-          <a:off x="0" y="0"/>
-          <a:ext cx="0" cy="0"/>
-          <a:chOff x="0" y="0"/>
-          <a:chExt cx="0" cy="0"/>
-        </a:xfrm>
-      </p:grpSpPr>
-      <p:sp>
-        <p:nvSpPr>
-          <p:cNvPr id="143" name="Clipping the Background"/>
-          <p:cNvSpPr txBox="1">
-            <a:spLocks noGrp="1"/>
-          </p:cNvSpPr>
-          <p:nvPr>
-            <p:ph type="title"/>
-          </p:nvPr>
-        </p:nvSpPr>
-        <p:spPr>
-          <a:prstGeom prst="rect">
-            <a:avLst/>
-          </a:prstGeom>
-        </p:spPr>
-        <p:txBody>
-          <a:bodyPr/>
-          <a:lstStyle/>
-          <a:p>
-            <a:r>
-              <a:t>Clipping the Background</a:t>
-            </a:r>
-          </a:p>
-        </p:txBody>
-      </p:sp>
-      <p:sp>
-        <p:nvSpPr>
-          <p:cNvPr id="144" name="background-clip…"/>
-          <p:cNvSpPr txBox="1">
-            <a:spLocks noGrp="1"/>
-          </p:cNvSpPr>
-          <p:nvPr>
-            <p:ph type="body" idx="4294967295"/>
-          </p:nvPr>
-        </p:nvSpPr>
-        <p:spPr>
-          <a:xfrm>
-            <a:off x="852983" y="2157015"/>
-            <a:ext cx="11392993" cy="6969424"/>
-          </a:xfrm>
-          <a:prstGeom prst="rect">
-            <a:avLst/>
-          </a:prstGeom>
-        </p:spPr>
-        <p:txBody>
-          <a:bodyPr anchor="t"/>
-          <a:lstStyle/>
-          <a:p>
-            <a:pPr marL="0" indent="0" algn="ctr">
-              <a:buSzTx/>
-              <a:buNone/>
-              <a:defRPr sz="3000" b="1">
-                <a:solidFill>
-                  <a:schemeClr val="accent1"/>
-                </a:solidFill>
-                <a:latin typeface="Courier"/>
-                <a:ea typeface="Courier"/>
-                <a:cs typeface="Courier"/>
-                <a:sym typeface="Courier"/>
-              </a:defRPr>
-            </a:pPr>
-            <a:r>
-              <a:t>background-clip</a:t>
-            </a:r>
-          </a:p>
-          <a:p>
-            <a:pPr marL="0" indent="0">
-              <a:spcBef>
-                <a:spcPts val="2400"/>
-              </a:spcBef>
-              <a:buSzTx/>
-              <a:buNone/>
-              <a:defRPr sz="3000"/>
-            </a:pPr>
-            <a:r>
-              <a:rPr b="1">
-                <a:latin typeface="+mj-lt"/>
-                <a:ea typeface="+mj-ea"/>
-                <a:cs typeface="+mj-cs"/>
-                <a:sym typeface="Helvetica"/>
-              </a:rPr>
-              <a:t>Values:</a:t>
-            </a:r>
-            <a:r>
-              <a:t> </a:t>
-            </a:r>
-            <a:r>
-              <a:rPr>
-                <a:latin typeface="Courier"/>
-                <a:ea typeface="Courier"/>
-                <a:cs typeface="Courier"/>
-                <a:sym typeface="Courier"/>
-              </a:rPr>
-              <a:t>border-box</a:t>
-            </a:r>
-            <a:r>
-              <a:rPr>
-                <a:latin typeface="+mj-lt"/>
-                <a:ea typeface="+mj-ea"/>
-                <a:cs typeface="+mj-cs"/>
-                <a:sym typeface="Helvetica"/>
-              </a:rPr>
-              <a:t>, </a:t>
-            </a:r>
-            <a:r>
-              <a:rPr>
-                <a:latin typeface="Courier"/>
-                <a:ea typeface="Courier"/>
-                <a:cs typeface="Courier"/>
-                <a:sym typeface="Courier"/>
-              </a:rPr>
-              <a:t>padding-box</a:t>
-            </a:r>
-            <a:r>
-              <a:rPr>
-                <a:latin typeface="+mj-lt"/>
-                <a:ea typeface="+mj-ea"/>
-                <a:cs typeface="+mj-cs"/>
-                <a:sym typeface="Helvetica"/>
-              </a:rPr>
-              <a:t>, </a:t>
-            </a:r>
-            <a:r>
-              <a:rPr>
-                <a:latin typeface="Courier"/>
-                <a:ea typeface="Courier"/>
-                <a:cs typeface="Courier"/>
-                <a:sym typeface="Courier"/>
-              </a:rPr>
-              <a:t>content-box</a:t>
-            </a:r>
-            <a:endParaRPr>
-              <a:latin typeface="+mj-lt"/>
-              <a:ea typeface="+mj-ea"/>
-              <a:cs typeface="+mj-cs"/>
-              <a:sym typeface="Helvetica"/>
-            </a:endParaRPr>
-          </a:p>
-          <a:p>
-            <a:pPr marL="0" indent="0">
-              <a:spcBef>
-                <a:spcPts val="3000"/>
-              </a:spcBef>
-              <a:buSzTx/>
-              <a:buNone/>
-              <a:defRPr sz="3000"/>
-            </a:pPr>
-            <a:r>
-              <a:t>Specifies where the background painting area ends.</a:t>
-            </a:r>
-          </a:p>
-        </p:txBody>
-      </p:sp>
-      <p:pic>
-        <p:nvPicPr>
-          <p:cNvPr id="145" name="lwd5_1312_clip.png" descr="lwd5_1312_clip.png"/>
-          <p:cNvPicPr>
-            <a:picLocks noChangeAspect="1"/>
-          </p:cNvPicPr>
-          <p:nvPr/>
-        </p:nvPicPr>
-        <p:blipFill>
-          <a:blip r:embed="rId2"/>
-          <a:stretch>
-            <a:fillRect/>
-          </a:stretch>
-        </p:blipFill>
-        <p:spPr>
-          <a:xfrm>
-            <a:off x="3083178" y="4675338"/>
-            <a:ext cx="6932603" cy="4373412"/>
-          </a:xfrm>
-          <a:prstGeom prst="rect">
-            <a:avLst/>
-          </a:prstGeom>
-          <a:ln w="12700">
-            <a:miter lim="400000"/>
-          </a:ln>
-        </p:spPr>
-      </p:pic>
-    </p:spTree>
-  </p:cSld>
-  <p:clrMapOvr>
-    <a:masterClrMapping/>
-  </p:clrMapOvr>
-  <p:transition spd="med"/>
-</p:sld>
-</file>
-
-<file path=ppt/slides/slide18.xml><?xml version="1.0" encoding="utf-8"?>
+<file path=ppt/slides/slide15.xml><?xml version="1.0" encoding="utf-8"?>
 <p:sld xmlns:a="http://schemas.openxmlformats.org/drawingml/2006/main" xmlns:r="http://schemas.openxmlformats.org/officeDocument/2006/relationships" xmlns:p="http://schemas.openxmlformats.org/presentationml/2006/main">
   <p:cSld>
     <p:spTree>
@@ -4457,7 +3952,7 @@
 </p:sld>
 </file>
 
-<file path=ppt/slides/slide19.xml><?xml version="1.0" encoding="utf-8"?>
+<file path=ppt/slides/slide16.xml><?xml version="1.0" encoding="utf-8"?>
 <p:sld xmlns:a="http://schemas.openxmlformats.org/drawingml/2006/main" xmlns:r="http://schemas.openxmlformats.org/officeDocument/2006/relationships" xmlns:p="http://schemas.openxmlformats.org/presentationml/2006/main">
   <p:cSld>
     <p:spTree>
@@ -4716,6 +4211,777 @@
           </a:ln>
         </p:spPr>
       </p:pic>
+    </p:spTree>
+  </p:cSld>
+  <p:clrMapOvr>
+    <a:masterClrMapping/>
+  </p:clrMapOvr>
+  <p:transition spd="med"/>
+</p:sld>
+</file>
+
+<file path=ppt/slides/slide17.xml><?xml version="1.0" encoding="utf-8"?>
+<p:sld xmlns:a="http://schemas.openxmlformats.org/drawingml/2006/main" xmlns:r="http://schemas.openxmlformats.org/officeDocument/2006/relationships" xmlns:p="http://schemas.openxmlformats.org/presentationml/2006/main">
+  <p:cSld>
+    <p:spTree>
+      <p:nvGrpSpPr>
+        <p:cNvPr id="1" name=""/>
+        <p:cNvGrpSpPr/>
+        <p:nvPr/>
+      </p:nvGrpSpPr>
+      <p:grpSpPr>
+        <a:xfrm>
+          <a:off x="0" y="0"/>
+          <a:ext cx="0" cy="0"/>
+          <a:chOff x="0" y="0"/>
+          <a:chExt cx="0" cy="0"/>
+        </a:xfrm>
+      </p:grpSpPr>
+      <p:sp>
+        <p:nvSpPr>
+          <p:cNvPr id="155" name="Background Repeating"/>
+          <p:cNvSpPr txBox="1">
+            <a:spLocks noGrp="1"/>
+          </p:cNvSpPr>
+          <p:nvPr>
+            <p:ph type="title"/>
+          </p:nvPr>
+        </p:nvSpPr>
+        <p:spPr>
+          <a:prstGeom prst="rect">
+            <a:avLst/>
+          </a:prstGeom>
+        </p:spPr>
+        <p:txBody>
+          <a:bodyPr/>
+          <a:lstStyle/>
+          <a:p>
+            <a:r>
+              <a:t>Background Repeating</a:t>
+            </a:r>
+          </a:p>
+        </p:txBody>
+      </p:sp>
+      <p:sp>
+        <p:nvSpPr>
+          <p:cNvPr id="156" name="background-repeat…"/>
+          <p:cNvSpPr txBox="1">
+            <a:spLocks noGrp="1"/>
+          </p:cNvSpPr>
+          <p:nvPr>
+            <p:ph type="body" idx="1"/>
+          </p:nvPr>
+        </p:nvSpPr>
+        <p:spPr>
+          <a:xfrm>
+            <a:off x="852983" y="2157015"/>
+            <a:ext cx="11392993" cy="6969424"/>
+          </a:xfrm>
+          <a:prstGeom prst="rect">
+            <a:avLst/>
+          </a:prstGeom>
+        </p:spPr>
+        <p:txBody>
+          <a:bodyPr anchor="t"/>
+          <a:lstStyle/>
+          <a:p>
+            <a:pPr marL="0" indent="0" algn="ctr">
+              <a:buSzTx/>
+              <a:buNone/>
+              <a:defRPr sz="3000" b="1">
+                <a:solidFill>
+                  <a:schemeClr val="accent1"/>
+                </a:solidFill>
+                <a:latin typeface="Courier"/>
+                <a:ea typeface="Courier"/>
+                <a:cs typeface="Courier"/>
+                <a:sym typeface="Courier"/>
+              </a:defRPr>
+            </a:pPr>
+            <a:r>
+              <a:t>background-repeat</a:t>
+            </a:r>
+          </a:p>
+          <a:p>
+            <a:pPr marL="0" indent="0">
+              <a:spcBef>
+                <a:spcPts val="2400"/>
+              </a:spcBef>
+              <a:buSzTx/>
+              <a:buNone/>
+              <a:defRPr sz="3000"/>
+            </a:pPr>
+            <a:r>
+              <a:rPr b="1">
+                <a:latin typeface="+mj-lt"/>
+                <a:ea typeface="+mj-ea"/>
+                <a:cs typeface="+mj-cs"/>
+                <a:sym typeface="Helvetica"/>
+              </a:rPr>
+              <a:t>Values:</a:t>
+            </a:r>
+            <a:r>
+              <a:t> </a:t>
+            </a:r>
+            <a:br/>
+            <a:r>
+              <a:rPr>
+                <a:latin typeface="Courier"/>
+                <a:ea typeface="Courier"/>
+                <a:cs typeface="Courier"/>
+                <a:sym typeface="Courier"/>
+              </a:rPr>
+              <a:t>repeat</a:t>
+            </a:r>
+            <a:r>
+              <a:rPr>
+                <a:latin typeface="+mj-lt"/>
+                <a:ea typeface="+mj-ea"/>
+                <a:cs typeface="+mj-cs"/>
+                <a:sym typeface="Helvetica"/>
+              </a:rPr>
+              <a:t>, </a:t>
+            </a:r>
+            <a:r>
+              <a:rPr>
+                <a:latin typeface="Courier"/>
+                <a:ea typeface="Courier"/>
+                <a:cs typeface="Courier"/>
+                <a:sym typeface="Courier"/>
+              </a:rPr>
+              <a:t>no-repeat</a:t>
+            </a:r>
+            <a:r>
+              <a:rPr>
+                <a:latin typeface="+mj-lt"/>
+                <a:ea typeface="+mj-ea"/>
+                <a:cs typeface="+mj-cs"/>
+                <a:sym typeface="Helvetica"/>
+              </a:rPr>
+              <a:t>, </a:t>
+            </a:r>
+            <a:r>
+              <a:rPr>
+                <a:latin typeface="Courier"/>
+                <a:ea typeface="Courier"/>
+                <a:cs typeface="Courier"/>
+                <a:sym typeface="Courier"/>
+              </a:rPr>
+              <a:t>repeat-x</a:t>
+            </a:r>
+            <a:r>
+              <a:rPr>
+                <a:latin typeface="+mj-lt"/>
+                <a:ea typeface="+mj-ea"/>
+                <a:cs typeface="+mj-cs"/>
+                <a:sym typeface="Helvetica"/>
+              </a:rPr>
+              <a:t>, </a:t>
+            </a:r>
+            <a:r>
+              <a:rPr>
+                <a:latin typeface="Courier"/>
+                <a:ea typeface="Courier"/>
+                <a:cs typeface="Courier"/>
+                <a:sym typeface="Courier"/>
+              </a:rPr>
+              <a:t>repeat-y</a:t>
+            </a:r>
+            <a:r>
+              <a:rPr>
+                <a:latin typeface="+mj-lt"/>
+                <a:ea typeface="+mj-ea"/>
+                <a:cs typeface="+mj-cs"/>
+                <a:sym typeface="Helvetica"/>
+              </a:rPr>
+              <a:t>, </a:t>
+            </a:r>
+            <a:r>
+              <a:rPr>
+                <a:latin typeface="Courier"/>
+                <a:ea typeface="Courier"/>
+                <a:cs typeface="Courier"/>
+                <a:sym typeface="Courier"/>
+              </a:rPr>
+              <a:t>space</a:t>
+            </a:r>
+            <a:r>
+              <a:rPr>
+                <a:latin typeface="+mj-lt"/>
+                <a:ea typeface="+mj-ea"/>
+                <a:cs typeface="+mj-cs"/>
+                <a:sym typeface="Helvetica"/>
+              </a:rPr>
+              <a:t>, </a:t>
+            </a:r>
+            <a:r>
+              <a:rPr>
+                <a:latin typeface="Courier"/>
+                <a:ea typeface="Courier"/>
+                <a:cs typeface="Courier"/>
+                <a:sym typeface="Courier"/>
+              </a:rPr>
+              <a:t>round</a:t>
+            </a:r>
+            <a:endParaRPr>
+              <a:latin typeface="+mj-lt"/>
+              <a:ea typeface="+mj-ea"/>
+              <a:cs typeface="+mj-cs"/>
+              <a:sym typeface="Helvetica"/>
+            </a:endParaRPr>
+          </a:p>
+          <a:p>
+            <a:pPr marL="0" indent="0">
+              <a:spcBef>
+                <a:spcPts val="3000"/>
+              </a:spcBef>
+              <a:buSzTx/>
+              <a:buNone/>
+              <a:defRPr sz="3000"/>
+            </a:pPr>
+            <a:r>
+              <a:t>Specifies how the background image repeats and can restrict it to tiling in one direction or not at all:</a:t>
+            </a:r>
+          </a:p>
+          <a:p>
+            <a:pPr marL="814916" lvl="1" indent="-370416">
+              <a:spcBef>
+                <a:spcPts val="1600"/>
+              </a:spcBef>
+              <a:defRPr sz="3000"/>
+            </a:pPr>
+            <a:r>
+              <a:rPr b="1">
+                <a:latin typeface="Courier"/>
+                <a:ea typeface="Courier"/>
+                <a:cs typeface="Courier"/>
+                <a:sym typeface="Courier"/>
+              </a:rPr>
+              <a:t>repeat-x</a:t>
+            </a:r>
+            <a:r>
+              <a:t>: Tiles horizontally only</a:t>
+            </a:r>
+          </a:p>
+          <a:p>
+            <a:pPr marL="814916" lvl="1" indent="-370416">
+              <a:spcBef>
+                <a:spcPts val="1600"/>
+              </a:spcBef>
+              <a:defRPr sz="3000"/>
+            </a:pPr>
+            <a:r>
+              <a:rPr b="1">
+                <a:latin typeface="Courier"/>
+                <a:ea typeface="Courier"/>
+                <a:cs typeface="Courier"/>
+                <a:sym typeface="Courier"/>
+              </a:rPr>
+              <a:t>repeat-y</a:t>
+            </a:r>
+            <a:r>
+              <a:t>: Tiles vertically only</a:t>
+            </a:r>
+          </a:p>
+          <a:p>
+            <a:pPr marL="814916" lvl="1" indent="-370416">
+              <a:spcBef>
+                <a:spcPts val="1600"/>
+              </a:spcBef>
+              <a:defRPr sz="3000"/>
+            </a:pPr>
+            <a:r>
+              <a:rPr b="1">
+                <a:latin typeface="Courier"/>
+                <a:ea typeface="Courier"/>
+                <a:cs typeface="Courier"/>
+                <a:sym typeface="Courier"/>
+              </a:rPr>
+              <a:t>space</a:t>
+            </a:r>
+            <a:r>
+              <a:t>: Adds space around images so they fit in the window with no clipping</a:t>
+            </a:r>
+          </a:p>
+          <a:p>
+            <a:pPr marL="814916" lvl="1" indent="-370416">
+              <a:spcBef>
+                <a:spcPts val="1600"/>
+              </a:spcBef>
+              <a:defRPr sz="3000"/>
+            </a:pPr>
+            <a:r>
+              <a:rPr b="1">
+                <a:latin typeface="Courier"/>
+                <a:ea typeface="Courier"/>
+                <a:cs typeface="Courier"/>
+                <a:sym typeface="Courier"/>
+              </a:rPr>
+              <a:t>round</a:t>
+            </a:r>
+            <a:r>
+              <a:t>: Distorts the image so it fits without clipping</a:t>
+            </a:r>
+          </a:p>
+        </p:txBody>
+      </p:sp>
+    </p:spTree>
+  </p:cSld>
+  <p:clrMapOvr>
+    <a:masterClrMapping/>
+  </p:clrMapOvr>
+  <p:transition spd="med"/>
+</p:sld>
+</file>
+
+<file path=ppt/slides/slide18.xml><?xml version="1.0" encoding="utf-8"?>
+<p:sld xmlns:a="http://schemas.openxmlformats.org/drawingml/2006/main" xmlns:r="http://schemas.openxmlformats.org/officeDocument/2006/relationships" xmlns:p="http://schemas.openxmlformats.org/presentationml/2006/main">
+  <p:cSld>
+    <p:spTree>
+      <p:nvGrpSpPr>
+        <p:cNvPr id="1" name=""/>
+        <p:cNvGrpSpPr/>
+        <p:nvPr/>
+      </p:nvGrpSpPr>
+      <p:grpSpPr>
+        <a:xfrm>
+          <a:off x="0" y="0"/>
+          <a:ext cx="0" cy="0"/>
+          <a:chOff x="0" y="0"/>
+          <a:chExt cx="0" cy="0"/>
+        </a:xfrm>
+      </p:grpSpPr>
+      <p:sp>
+        <p:nvSpPr>
+          <p:cNvPr id="158" name="Background Repeating (cont’d)"/>
+          <p:cNvSpPr txBox="1">
+            <a:spLocks noGrp="1"/>
+          </p:cNvSpPr>
+          <p:nvPr>
+            <p:ph type="title"/>
+          </p:nvPr>
+        </p:nvSpPr>
+        <p:spPr>
+          <a:xfrm>
+            <a:off x="952500" y="444500"/>
+            <a:ext cx="11099800" cy="1190774"/>
+          </a:xfrm>
+          <a:prstGeom prst="rect">
+            <a:avLst/>
+          </a:prstGeom>
+        </p:spPr>
+        <p:txBody>
+          <a:bodyPr/>
+          <a:lstStyle>
+            <a:lvl1pPr>
+              <a:defRPr sz="3600"/>
+            </a:lvl1pPr>
+          </a:lstStyle>
+          <a:p>
+            <a:r>
+              <a:t>Background Repeating (cont’d)</a:t>
+            </a:r>
+          </a:p>
+        </p:txBody>
+      </p:sp>
+      <p:pic>
+        <p:nvPicPr>
+          <p:cNvPr id="159" name="lwd5_1320_repeat.png" descr="lwd5_1320_repeat.png"/>
+          <p:cNvPicPr>
+            <a:picLocks noChangeAspect="1"/>
+          </p:cNvPicPr>
+          <p:nvPr/>
+        </p:nvPicPr>
+        <p:blipFill>
+          <a:blip r:embed="rId2"/>
+          <a:stretch>
+            <a:fillRect/>
+          </a:stretch>
+        </p:blipFill>
+        <p:spPr>
+          <a:xfrm>
+            <a:off x="2614112" y="1634173"/>
+            <a:ext cx="7776576" cy="7336393"/>
+          </a:xfrm>
+          <a:prstGeom prst="rect">
+            <a:avLst/>
+          </a:prstGeom>
+          <a:ln w="12700">
+            <a:miter lim="400000"/>
+          </a:ln>
+        </p:spPr>
+      </p:pic>
+    </p:spTree>
+  </p:cSld>
+  <p:clrMapOvr>
+    <a:masterClrMapping/>
+  </p:clrMapOvr>
+  <p:transition spd="med"/>
+</p:sld>
+</file>
+
+<file path=ppt/slides/slide19.xml><?xml version="1.0" encoding="utf-8"?>
+<p:sld xmlns:a="http://schemas.openxmlformats.org/drawingml/2006/main" xmlns:r="http://schemas.openxmlformats.org/officeDocument/2006/relationships" xmlns:p="http://schemas.openxmlformats.org/presentationml/2006/main">
+  <p:cSld>
+    <p:spTree>
+      <p:nvGrpSpPr>
+        <p:cNvPr id="1" name=""/>
+        <p:cNvGrpSpPr/>
+        <p:nvPr/>
+      </p:nvGrpSpPr>
+      <p:grpSpPr>
+        <a:xfrm>
+          <a:off x="0" y="0"/>
+          <a:ext cx="0" cy="0"/>
+          <a:chOff x="0" y="0"/>
+          <a:chExt cx="0" cy="0"/>
+        </a:xfrm>
+      </p:grpSpPr>
+      <p:sp>
+        <p:nvSpPr>
+          <p:cNvPr id="161" name="Background Position"/>
+          <p:cNvSpPr txBox="1">
+            <a:spLocks noGrp="1"/>
+          </p:cNvSpPr>
+          <p:nvPr>
+            <p:ph type="title"/>
+          </p:nvPr>
+        </p:nvSpPr>
+        <p:spPr>
+          <a:prstGeom prst="rect">
+            <a:avLst/>
+          </a:prstGeom>
+        </p:spPr>
+        <p:txBody>
+          <a:bodyPr/>
+          <a:lstStyle/>
+          <a:p>
+            <a:r>
+              <a:t>Background Position</a:t>
+            </a:r>
+          </a:p>
+        </p:txBody>
+      </p:sp>
+      <p:sp>
+        <p:nvSpPr>
+          <p:cNvPr id="162" name="background-position…"/>
+          <p:cNvSpPr txBox="1">
+            <a:spLocks noGrp="1"/>
+          </p:cNvSpPr>
+          <p:nvPr>
+            <p:ph type="body" idx="4294967295"/>
+          </p:nvPr>
+        </p:nvSpPr>
+        <p:spPr>
+          <a:xfrm>
+            <a:off x="852983" y="2157015"/>
+            <a:ext cx="11392993" cy="6969424"/>
+          </a:xfrm>
+          <a:prstGeom prst="rect">
+            <a:avLst/>
+          </a:prstGeom>
+        </p:spPr>
+        <p:txBody>
+          <a:bodyPr anchor="t"/>
+          <a:lstStyle/>
+          <a:p>
+            <a:pPr marL="0" indent="0" algn="ctr">
+              <a:buSzTx/>
+              <a:buNone/>
+              <a:defRPr sz="3000" b="1">
+                <a:solidFill>
+                  <a:schemeClr val="accent1"/>
+                </a:solidFill>
+                <a:latin typeface="Courier"/>
+                <a:ea typeface="Courier"/>
+                <a:cs typeface="Courier"/>
+                <a:sym typeface="Courier"/>
+              </a:defRPr>
+            </a:pPr>
+            <a:r>
+              <a:t>background-position</a:t>
+            </a:r>
+          </a:p>
+          <a:p>
+            <a:pPr marL="0" indent="0">
+              <a:spcBef>
+                <a:spcPts val="2400"/>
+              </a:spcBef>
+              <a:buSzTx/>
+              <a:buNone/>
+              <a:defRPr sz="3000"/>
+            </a:pPr>
+            <a:r>
+              <a:rPr b="1">
+                <a:latin typeface="+mj-lt"/>
+                <a:ea typeface="+mj-ea"/>
+                <a:cs typeface="+mj-cs"/>
+                <a:sym typeface="Helvetica"/>
+              </a:rPr>
+              <a:t>Values:</a:t>
+            </a:r>
+            <a:r>
+              <a:t> </a:t>
+            </a:r>
+            <a:br/>
+            <a:r>
+              <a:rPr i="1"/>
+              <a:t>Length</a:t>
+            </a:r>
+            <a:r>
+              <a:rPr>
+                <a:latin typeface="+mj-lt"/>
+                <a:ea typeface="+mj-ea"/>
+                <a:cs typeface="+mj-cs"/>
+                <a:sym typeface="Helvetica"/>
+              </a:rPr>
+              <a:t>, </a:t>
+            </a:r>
+            <a:r>
+              <a:rPr i="1"/>
+              <a:t>percentage</a:t>
+            </a:r>
+            <a:r>
+              <a:rPr>
+                <a:latin typeface="+mj-lt"/>
+                <a:ea typeface="+mj-ea"/>
+                <a:cs typeface="+mj-cs"/>
+                <a:sym typeface="Helvetica"/>
+              </a:rPr>
+              <a:t>, </a:t>
+            </a:r>
+            <a:r>
+              <a:rPr>
+                <a:latin typeface="Courier"/>
+                <a:ea typeface="Courier"/>
+                <a:cs typeface="Courier"/>
+                <a:sym typeface="Courier"/>
+              </a:rPr>
+              <a:t>left</a:t>
+            </a:r>
+            <a:r>
+              <a:rPr>
+                <a:latin typeface="+mj-lt"/>
+                <a:ea typeface="+mj-ea"/>
+                <a:cs typeface="+mj-cs"/>
+                <a:sym typeface="Helvetica"/>
+              </a:rPr>
+              <a:t>, </a:t>
+            </a:r>
+            <a:r>
+              <a:rPr>
+                <a:latin typeface="Courier"/>
+                <a:ea typeface="Courier"/>
+                <a:cs typeface="Courier"/>
+                <a:sym typeface="Courier"/>
+              </a:rPr>
+              <a:t>center</a:t>
+            </a:r>
+            <a:r>
+              <a:rPr>
+                <a:latin typeface="+mj-lt"/>
+                <a:ea typeface="+mj-ea"/>
+                <a:cs typeface="+mj-cs"/>
+                <a:sym typeface="Helvetica"/>
+              </a:rPr>
+              <a:t>, </a:t>
+            </a:r>
+            <a:r>
+              <a:rPr>
+                <a:latin typeface="Courier"/>
+                <a:ea typeface="Courier"/>
+                <a:cs typeface="Courier"/>
+                <a:sym typeface="Courier"/>
+              </a:rPr>
+              <a:t>right</a:t>
+            </a:r>
+            <a:r>
+              <a:rPr>
+                <a:latin typeface="+mj-lt"/>
+                <a:ea typeface="+mj-ea"/>
+                <a:cs typeface="+mj-cs"/>
+                <a:sym typeface="Helvetica"/>
+              </a:rPr>
+              <a:t>, </a:t>
+            </a:r>
+            <a:r>
+              <a:rPr>
+                <a:latin typeface="Courier"/>
+                <a:ea typeface="Courier"/>
+                <a:cs typeface="Courier"/>
+                <a:sym typeface="Courier"/>
+              </a:rPr>
+              <a:t>top</a:t>
+            </a:r>
+            <a:r>
+              <a:rPr>
+                <a:latin typeface="+mj-lt"/>
+                <a:ea typeface="+mj-ea"/>
+                <a:cs typeface="+mj-cs"/>
+                <a:sym typeface="Helvetica"/>
+              </a:rPr>
+              <a:t>, </a:t>
+            </a:r>
+            <a:r>
+              <a:rPr>
+                <a:latin typeface="Courier"/>
+                <a:ea typeface="Courier"/>
+                <a:cs typeface="Courier"/>
+                <a:sym typeface="Courier"/>
+              </a:rPr>
+              <a:t>bottom</a:t>
+            </a:r>
+            <a:endParaRPr>
+              <a:latin typeface="+mj-lt"/>
+              <a:ea typeface="+mj-ea"/>
+              <a:cs typeface="+mj-cs"/>
+              <a:sym typeface="Helvetica"/>
+            </a:endParaRPr>
+          </a:p>
+          <a:p>
+            <a:pPr marL="0" indent="0">
+              <a:spcBef>
+                <a:spcPts val="3000"/>
+              </a:spcBef>
+              <a:buSzTx/>
+              <a:buNone/>
+              <a:defRPr sz="3000"/>
+            </a:pPr>
+            <a:r>
+              <a:t>Specifies the position of the</a:t>
+            </a:r>
+            <a:r>
+              <a:rPr b="1">
+                <a:latin typeface="+mj-lt"/>
+                <a:ea typeface="+mj-ea"/>
+                <a:cs typeface="+mj-cs"/>
+                <a:sym typeface="Helvetica"/>
+              </a:rPr>
+              <a:t> origin image</a:t>
+            </a:r>
+            <a:r>
+              <a:t>, the first image that is placed in the background from which tiling images extend.</a:t>
+            </a:r>
+          </a:p>
+          <a:p>
+            <a:pPr marL="0" indent="0">
+              <a:spcBef>
+                <a:spcPts val="3000"/>
+              </a:spcBef>
+              <a:buSzTx/>
+              <a:buNone/>
+              <a:defRPr sz="3000" b="1">
+                <a:latin typeface="+mj-lt"/>
+                <a:ea typeface="+mj-ea"/>
+                <a:cs typeface="+mj-cs"/>
+                <a:sym typeface="Helvetica"/>
+              </a:defRPr>
+            </a:pPr>
+            <a:r>
+              <a:t>Examples </a:t>
+            </a:r>
+            <a:r>
+              <a:rPr b="0">
+                <a:latin typeface="+mn-lt"/>
+                <a:ea typeface="+mn-ea"/>
+                <a:cs typeface="+mn-cs"/>
+                <a:sym typeface="Helvetica Light"/>
+              </a:rPr>
+              <a:t>(horizontal position goes first):</a:t>
+            </a:r>
+          </a:p>
+          <a:p>
+            <a:pPr marL="0" indent="0" algn="ctr">
+              <a:spcBef>
+                <a:spcPts val="3000"/>
+              </a:spcBef>
+              <a:buSzTx/>
+              <a:buNone/>
+              <a:defRPr sz="2700">
+                <a:latin typeface="Courier"/>
+                <a:ea typeface="Courier"/>
+                <a:cs typeface="Courier"/>
+                <a:sym typeface="Courier"/>
+              </a:defRPr>
+            </a:pPr>
+            <a:r>
+              <a:rPr b="1">
+                <a:solidFill>
+                  <a:schemeClr val="accent4">
+                    <a:hueOff val="384618"/>
+                    <a:satOff val="3869"/>
+                    <a:lumOff val="5802"/>
+                  </a:schemeClr>
+                </a:solidFill>
+              </a:rPr>
+              <a:t>background-position:</a:t>
+            </a:r>
+            <a:r>
+              <a:t> left bottom;</a:t>
+            </a:r>
+          </a:p>
+          <a:p>
+            <a:pPr marL="0" indent="0" algn="ctr">
+              <a:spcBef>
+                <a:spcPts val="3000"/>
+              </a:spcBef>
+              <a:buSzTx/>
+              <a:buNone/>
+              <a:defRPr sz="2700">
+                <a:latin typeface="Courier"/>
+                <a:ea typeface="Courier"/>
+                <a:cs typeface="Courier"/>
+                <a:sym typeface="Courier"/>
+              </a:defRPr>
+            </a:pPr>
+            <a:r>
+              <a:rPr b="1">
+                <a:solidFill>
+                  <a:schemeClr val="accent4">
+                    <a:hueOff val="384618"/>
+                    <a:satOff val="3869"/>
+                    <a:lumOff val="5802"/>
+                  </a:schemeClr>
+                </a:solidFill>
+              </a:rPr>
+              <a:t>background-position:</a:t>
+            </a:r>
+            <a:r>
+              <a:t> 300px 100px;</a:t>
+            </a:r>
+          </a:p>
+          <a:p>
+            <a:pPr marL="0" indent="0" algn="ctr">
+              <a:spcBef>
+                <a:spcPts val="3000"/>
+              </a:spcBef>
+              <a:buSzTx/>
+              <a:buNone/>
+              <a:defRPr sz="2700">
+                <a:latin typeface="Courier"/>
+                <a:ea typeface="Courier"/>
+                <a:cs typeface="Courier"/>
+                <a:sym typeface="Courier"/>
+              </a:defRPr>
+            </a:pPr>
+            <a:r>
+              <a:rPr b="1">
+                <a:solidFill>
+                  <a:schemeClr val="accent4">
+                    <a:hueOff val="384618"/>
+                    <a:satOff val="3869"/>
+                    <a:lumOff val="5802"/>
+                  </a:schemeClr>
+                </a:solidFill>
+              </a:rPr>
+              <a:t>background-position:</a:t>
+            </a:r>
+            <a:r>
+              <a:t> 25% 100%;</a:t>
+            </a:r>
+          </a:p>
+        </p:txBody>
+      </p:sp>
     </p:spTree>
   </p:cSld>
   <p:clrMapOvr>
@@ -4886,7 +5152,7 @@
       </p:grpSpPr>
       <p:sp>
         <p:nvSpPr>
-          <p:cNvPr id="155" name="Background Repeating"/>
+          <p:cNvPr id="176" name="Shorthand background Property"/>
           <p:cNvSpPr txBox="1">
             <a:spLocks noGrp="1"/>
           </p:cNvSpPr>
@@ -4904,14 +5170,14 @@
           <a:lstStyle/>
           <a:p>
             <a:r>
-              <a:t>Background Repeating</a:t>
+              <a:t>Shorthand background Property</a:t>
             </a:r>
           </a:p>
         </p:txBody>
       </p:sp>
       <p:sp>
         <p:nvSpPr>
-          <p:cNvPr id="156" name="background-repeat…"/>
+          <p:cNvPr id="177" name="background…"/>
           <p:cNvSpPr txBox="1">
             <a:spLocks noGrp="1"/>
           </p:cNvSpPr>
@@ -4921,21 +5187,24 @@
         </p:nvSpPr>
         <p:spPr>
           <a:xfrm>
-            <a:off x="852983" y="2157015"/>
-            <a:ext cx="11392993" cy="6969424"/>
+            <a:off x="952500" y="2120900"/>
+            <a:ext cx="11099800" cy="6885286"/>
           </a:xfrm>
           <a:prstGeom prst="rect">
             <a:avLst/>
           </a:prstGeom>
         </p:spPr>
         <p:txBody>
-          <a:bodyPr anchor="t"/>
+          <a:bodyPr/>
           <a:lstStyle/>
           <a:p>
-            <a:pPr marL="0" indent="0" algn="ctr">
+            <a:pPr marL="0" indent="0" algn="ctr" defTabSz="566674">
+              <a:spcBef>
+                <a:spcPts val="4000"/>
+              </a:spcBef>
               <a:buSzTx/>
               <a:buNone/>
-              <a:defRPr sz="3000" b="1">
+              <a:defRPr sz="2910" b="1">
                 <a:solidFill>
                   <a:schemeClr val="accent1"/>
                 </a:solidFill>
@@ -4946,17 +5215,17 @@
               </a:defRPr>
             </a:pPr>
             <a:r>
-              <a:t>background-repeat</a:t>
-            </a:r>
-          </a:p>
-          <a:p>
-            <a:pPr marL="0" indent="0">
+              <a:t>background</a:t>
+            </a:r>
+          </a:p>
+          <a:p>
+            <a:pPr marL="0" indent="0" defTabSz="566674">
               <a:spcBef>
-                <a:spcPts val="2400"/>
+                <a:spcPts val="2300"/>
               </a:spcBef>
               <a:buSzTx/>
               <a:buNone/>
-              <a:defRPr sz="3000"/>
+              <a:defRPr sz="2910"/>
             </a:pPr>
             <a:r>
               <a:rPr b="1">
@@ -4972,103 +5241,8 @@
             </a:r>
             <a:br/>
             <a:r>
-              <a:rPr>
-                <a:latin typeface="Courier"/>
-                <a:ea typeface="Courier"/>
-                <a:cs typeface="Courier"/>
-                <a:sym typeface="Courier"/>
-              </a:rPr>
-              <a:t>repeat</a:t>
-            </a:r>
-            <a:r>
-              <a:rPr>
-                <a:latin typeface="+mj-lt"/>
-                <a:ea typeface="+mj-ea"/>
-                <a:cs typeface="+mj-cs"/>
-                <a:sym typeface="Helvetica"/>
-              </a:rPr>
-              <a:t>, </a:t>
-            </a:r>
-            <a:r>
-              <a:rPr>
-                <a:latin typeface="Courier"/>
-                <a:ea typeface="Courier"/>
-                <a:cs typeface="Courier"/>
-                <a:sym typeface="Courier"/>
-              </a:rPr>
-              <a:t>no-repeat</a:t>
-            </a:r>
-            <a:r>
-              <a:rPr>
-                <a:latin typeface="+mj-lt"/>
-                <a:ea typeface="+mj-ea"/>
-                <a:cs typeface="+mj-cs"/>
-                <a:sym typeface="Helvetica"/>
-              </a:rPr>
-              <a:t>, </a:t>
-            </a:r>
-            <a:r>
-              <a:rPr>
-                <a:latin typeface="Courier"/>
-                <a:ea typeface="Courier"/>
-                <a:cs typeface="Courier"/>
-                <a:sym typeface="Courier"/>
-              </a:rPr>
-              <a:t>repeat-x</a:t>
-            </a:r>
-            <a:r>
-              <a:rPr>
-                <a:latin typeface="+mj-lt"/>
-                <a:ea typeface="+mj-ea"/>
-                <a:cs typeface="+mj-cs"/>
-                <a:sym typeface="Helvetica"/>
-              </a:rPr>
-              <a:t>, </a:t>
-            </a:r>
-            <a:r>
-              <a:rPr>
-                <a:latin typeface="Courier"/>
-                <a:ea typeface="Courier"/>
-                <a:cs typeface="Courier"/>
-                <a:sym typeface="Courier"/>
-              </a:rPr>
-              <a:t>repeat-y</a:t>
-            </a:r>
-            <a:r>
-              <a:rPr>
-                <a:latin typeface="+mj-lt"/>
-                <a:ea typeface="+mj-ea"/>
-                <a:cs typeface="+mj-cs"/>
-                <a:sym typeface="Helvetica"/>
-              </a:rPr>
-              <a:t>, </a:t>
-            </a:r>
-            <a:r>
-              <a:rPr>
-                <a:latin typeface="Courier"/>
-                <a:ea typeface="Courier"/>
-                <a:cs typeface="Courier"/>
-                <a:sym typeface="Courier"/>
-              </a:rPr>
-              <a:t>space</a:t>
-            </a:r>
-            <a:r>
-              <a:rPr>
-                <a:latin typeface="+mj-lt"/>
-                <a:ea typeface="+mj-ea"/>
-                <a:cs typeface="+mj-cs"/>
-                <a:sym typeface="Helvetica"/>
-              </a:rPr>
-              <a:t>, </a:t>
-            </a:r>
-            <a:r>
-              <a:rPr>
-                <a:latin typeface="Courier"/>
-                <a:ea typeface="Courier"/>
-                <a:cs typeface="Courier"/>
-                <a:sym typeface="Courier"/>
-              </a:rPr>
-              <a:t>round</a:t>
+              <a:rPr i="1"/>
+              <a:t>background-color  background-image  background-repeat  background-attachment  background-position  background-clip  background-origin  background-size</a:t>
             </a:r>
             <a:endParaRPr>
               <a:latin typeface="+mj-lt"/>
@@ -5078,96 +5252,74 @@
             </a:endParaRPr>
           </a:p>
           <a:p>
-            <a:pPr marL="0" indent="0">
+            <a:pPr marL="431165" indent="-431165" defTabSz="566674">
               <a:spcBef>
-                <a:spcPts val="3000"/>
+                <a:spcPts val="4000"/>
+              </a:spcBef>
+              <a:defRPr sz="2910"/>
+            </a:pPr>
+            <a:r>
+              <a:t>Specifies all background properties in one declaration</a:t>
+            </a:r>
+          </a:p>
+          <a:p>
+            <a:pPr marL="0" lvl="3" indent="665226" defTabSz="566674">
+              <a:spcBef>
+                <a:spcPts val="2900"/>
               </a:spcBef>
               <a:buSzTx/>
               <a:buNone/>
-              <a:defRPr sz="3000"/>
-            </a:pPr>
-            <a:r>
-              <a:t>Specifies how the background image repeats and can restrict it to tiling in one direction or not at all:</a:t>
-            </a:r>
-          </a:p>
-          <a:p>
-            <a:pPr marL="814916" lvl="1" indent="-370416">
-              <a:spcBef>
-                <a:spcPts val="1600"/>
-              </a:spcBef>
-              <a:defRPr sz="3000"/>
-            </a:pPr>
-            <a:r>
-              <a:rPr b="1">
+              <a:defRPr sz="2619">
                 <a:latin typeface="Courier"/>
                 <a:ea typeface="Courier"/>
                 <a:cs typeface="Courier"/>
                 <a:sym typeface="Courier"/>
-              </a:rPr>
-              <a:t>repeat-x</a:t>
-            </a:r>
-            <a:r>
-              <a:t>: Tiles horizontally only</a:t>
-            </a:r>
-          </a:p>
-          <a:p>
-            <a:pPr marL="814916" lvl="1" indent="-370416">
+              </a:defRPr>
+            </a:pPr>
+            <a:r>
+              <a:rPr b="1">
+                <a:solidFill>
+                  <a:schemeClr val="accent4">
+                    <a:hueOff val="384618"/>
+                    <a:satOff val="3869"/>
+                    <a:lumOff val="5802"/>
+                  </a:schemeClr>
+                </a:solidFill>
+              </a:rPr>
+              <a:t>background:</a:t>
+            </a:r>
+            <a:r>
+              <a:t> white url(star.png) no-repeat top center fixed;</a:t>
+            </a:r>
+          </a:p>
+          <a:p>
+            <a:pPr marL="431165" indent="-431165" defTabSz="566674">
               <a:spcBef>
-                <a:spcPts val="1600"/>
+                <a:spcPts val="2900"/>
               </a:spcBef>
-              <a:defRPr sz="3000"/>
-            </a:pPr>
-            <a:r>
-              <a:rPr b="1">
-                <a:latin typeface="Courier"/>
-                <a:ea typeface="Courier"/>
-                <a:cs typeface="Courier"/>
-                <a:sym typeface="Courier"/>
-              </a:rPr>
-              <a:t>repeat-y</a:t>
-            </a:r>
-            <a:r>
-              <a:t>: Tiles vertically only</a:t>
-            </a:r>
-          </a:p>
-          <a:p>
-            <a:pPr marL="814916" lvl="1" indent="-370416">
+              <a:defRPr sz="2910"/>
+            </a:pPr>
+            <a:r>
+              <a:t>Properties are optional and may appear in any order</a:t>
+            </a:r>
+          </a:p>
+          <a:p>
+            <a:pPr marL="431165" indent="-431165" defTabSz="566674">
               <a:spcBef>
-                <a:spcPts val="1600"/>
+                <a:spcPts val="2900"/>
               </a:spcBef>
-              <a:defRPr sz="3000"/>
-            </a:pPr>
-            <a:r>
-              <a:rPr b="1">
-                <a:latin typeface="Courier"/>
-                <a:ea typeface="Courier"/>
-                <a:cs typeface="Courier"/>
-                <a:sym typeface="Courier"/>
-              </a:rPr>
-              <a:t>space</a:t>
-            </a:r>
-            <a:r>
-              <a:t>: Adds space around images so they fit in the window with no clipping</a:t>
-            </a:r>
-          </a:p>
-          <a:p>
-            <a:pPr marL="814916" lvl="1" indent="-370416">
-              <a:spcBef>
-                <a:spcPts val="1600"/>
-              </a:spcBef>
-              <a:defRPr sz="3000"/>
-            </a:pPr>
-            <a:r>
-              <a:rPr b="1">
-                <a:latin typeface="Courier"/>
-                <a:ea typeface="Courier"/>
-                <a:cs typeface="Courier"/>
-                <a:sym typeface="Courier"/>
-              </a:rPr>
-              <a:t>round</a:t>
-            </a:r>
-            <a:r>
-              <a:t>: Distorts the image so it fits without clipping</a:t>
+              <a:defRPr sz="2910"/>
+            </a:pPr>
+            <a:r>
+              <a:t>Properties not represented reset to their defaults—</a:t>
+            </a:r>
+            <a:r>
+              <a:rPr>
+                <a:solidFill>
+                  <a:schemeClr val="accent4"/>
+                </a:solidFill>
+              </a:rPr>
+              <a:t>be careful it doesn’t overwrite previous background settings.</a:t>
             </a:r>
           </a:p>
         </p:txBody>
@@ -5200,7 +5352,7 @@
       </p:grpSpPr>
       <p:sp>
         <p:nvSpPr>
-          <p:cNvPr id="158" name="Background Repeating (cont’d)"/>
+          <p:cNvPr id="179" name="Multiple Background Images"/>
           <p:cNvSpPr txBox="1">
             <a:spLocks noGrp="1"/>
           </p:cNvSpPr>
@@ -5209,55 +5361,162 @@
           </p:nvPr>
         </p:nvSpPr>
         <p:spPr>
+          <a:prstGeom prst="rect">
+            <a:avLst/>
+          </a:prstGeom>
+        </p:spPr>
+        <p:txBody>
+          <a:bodyPr/>
+          <a:lstStyle/>
+          <a:p>
+            <a:r>
+              <a:t>Multiple Background Images</a:t>
+            </a:r>
+          </a:p>
+        </p:txBody>
+      </p:sp>
+      <p:sp>
+        <p:nvSpPr>
+          <p:cNvPr id="180" name="You can place more than one background image in a single image (separated by commas):…"/>
+          <p:cNvSpPr txBox="1">
+            <a:spLocks noGrp="1"/>
+          </p:cNvSpPr>
+          <p:nvPr>
+            <p:ph type="body" idx="1"/>
+          </p:nvPr>
+        </p:nvSpPr>
+        <p:spPr>
           <a:xfrm>
-            <a:off x="952500" y="444500"/>
-            <a:ext cx="11099800" cy="1190774"/>
+            <a:off x="952500" y="2603500"/>
+            <a:ext cx="11099800" cy="5677893"/>
           </a:xfrm>
           <a:prstGeom prst="rect">
             <a:avLst/>
           </a:prstGeom>
         </p:spPr>
         <p:txBody>
-          <a:bodyPr/>
-          <a:lstStyle>
-            <a:lvl1pPr>
-              <a:defRPr sz="3600"/>
-            </a:lvl1pPr>
-          </a:lstStyle>
-          <a:p>
-            <a:r>
-              <a:t>Background Repeating (cont’d)</a:t>
+          <a:bodyPr anchor="t"/>
+          <a:lstStyle/>
+          <a:p>
+            <a:pPr marL="0" indent="0">
+              <a:buSzTx/>
+              <a:buNone/>
+              <a:defRPr sz="3000"/>
+            </a:pPr>
+            <a:r>
+              <a:t>You can place more than one background image in a single image (separated by commas):</a:t>
+            </a:r>
+          </a:p>
+          <a:p>
+            <a:pPr marL="0" lvl="2" indent="457200">
+              <a:spcBef>
+                <a:spcPts val="6000"/>
+              </a:spcBef>
+              <a:buSzTx/>
+              <a:buNone/>
+              <a:defRPr sz="2700">
+                <a:latin typeface="Courier"/>
+                <a:ea typeface="Courier"/>
+                <a:cs typeface="Courier"/>
+                <a:sym typeface="Courier"/>
+              </a:defRPr>
+            </a:pPr>
+            <a:r>
+              <a:t>body {</a:t>
+            </a:r>
+          </a:p>
+          <a:p>
+            <a:pPr marL="0" lvl="2" indent="457200">
+              <a:spcBef>
+                <a:spcPts val="0"/>
+              </a:spcBef>
+              <a:buSzTx/>
+              <a:buNone/>
+              <a:defRPr sz="2700">
+                <a:latin typeface="Courier"/>
+                <a:ea typeface="Courier"/>
+                <a:cs typeface="Courier"/>
+                <a:sym typeface="Courier"/>
+              </a:defRPr>
+            </a:pPr>
+            <a:r>
+              <a:t>  background:</a:t>
+            </a:r>
+          </a:p>
+          <a:p>
+            <a:pPr marL="0" lvl="2" indent="457200">
+              <a:spcBef>
+                <a:spcPts val="0"/>
+              </a:spcBef>
+              <a:buSzTx/>
+              <a:buNone/>
+              <a:defRPr sz="2700">
+                <a:latin typeface="Courier"/>
+                <a:ea typeface="Courier"/>
+                <a:cs typeface="Courier"/>
+                <a:sym typeface="Courier"/>
+              </a:defRPr>
+            </a:pPr>
+            <a:r>
+              <a:t>    url(image1.png) left top no-repeat,</a:t>
+            </a:r>
+          </a:p>
+          <a:p>
+            <a:pPr marL="0" lvl="2" indent="457200">
+              <a:spcBef>
+                <a:spcPts val="0"/>
+              </a:spcBef>
+              <a:buSzTx/>
+              <a:buNone/>
+              <a:defRPr sz="2700">
+                <a:latin typeface="Courier"/>
+                <a:ea typeface="Courier"/>
+                <a:cs typeface="Courier"/>
+                <a:sym typeface="Courier"/>
+              </a:defRPr>
+            </a:pPr>
+            <a:r>
+              <a:t>    url(image2.png) center center no-repeat,</a:t>
+            </a:r>
+          </a:p>
+          <a:p>
+            <a:pPr marL="0" lvl="2" indent="457200">
+              <a:spcBef>
+                <a:spcPts val="0"/>
+              </a:spcBef>
+              <a:buSzTx/>
+              <a:buNone/>
+              <a:defRPr sz="2700">
+                <a:latin typeface="Courier"/>
+                <a:ea typeface="Courier"/>
+                <a:cs typeface="Courier"/>
+                <a:sym typeface="Courier"/>
+              </a:defRPr>
+            </a:pPr>
+            <a:r>
+              <a:t>    url(image3.png) right bottom no-repeat;</a:t>
+            </a:r>
+          </a:p>
+          <a:p>
+            <a:pPr marL="0" lvl="2" indent="457200">
+              <a:spcBef>
+                <a:spcPts val="0"/>
+              </a:spcBef>
+              <a:buSzTx/>
+              <a:buNone/>
+              <a:defRPr sz="2700">
+                <a:latin typeface="Courier"/>
+                <a:ea typeface="Courier"/>
+                <a:cs typeface="Courier"/>
+                <a:sym typeface="Courier"/>
+              </a:defRPr>
+            </a:pPr>
+            <a:r>
+              <a:t>  }</a:t>
             </a:r>
           </a:p>
         </p:txBody>
       </p:sp>
-      <p:pic>
-        <p:nvPicPr>
-          <p:cNvPr id="159" name="lwd5_1320_repeat.png" descr="lwd5_1320_repeat.png"/>
-          <p:cNvPicPr>
-            <a:picLocks noChangeAspect="1"/>
-          </p:cNvPicPr>
-          <p:nvPr/>
-        </p:nvPicPr>
-        <p:blipFill>
-          <a:blip r:embed="rId2"/>
-          <a:stretch>
-            <a:fillRect/>
-          </a:stretch>
-        </p:blipFill>
-        <p:spPr>
-          <a:xfrm>
-            <a:off x="2614112" y="1634173"/>
-            <a:ext cx="7776576" cy="7336393"/>
-          </a:xfrm>
-          <a:prstGeom prst="rect">
-            <a:avLst/>
-          </a:prstGeom>
-          <a:ln w="12700">
-            <a:miter lim="400000"/>
-          </a:ln>
-        </p:spPr>
-      </p:pic>
     </p:spTree>
   </p:cSld>
   <p:clrMapOvr>
@@ -5286,7 +5545,7 @@
       </p:grpSpPr>
       <p:sp>
         <p:nvSpPr>
-          <p:cNvPr id="161" name="Background Position"/>
+          <p:cNvPr id="182" name="Gradient Fills"/>
           <p:cNvSpPr txBox="1">
             <a:spLocks noGrp="1"/>
           </p:cNvSpPr>
@@ -5304,41 +5563,157 @@
           <a:lstStyle/>
           <a:p>
             <a:r>
-              <a:t>Background Position</a:t>
+              <a:t>Gradient Fills</a:t>
             </a:r>
           </a:p>
         </p:txBody>
       </p:sp>
       <p:sp>
         <p:nvSpPr>
-          <p:cNvPr id="162" name="background-position…"/>
+          <p:cNvPr id="183" name="A gradient is a transition from one color to another.…"/>
           <p:cNvSpPr txBox="1">
             <a:spLocks noGrp="1"/>
           </p:cNvSpPr>
           <p:nvPr>
-            <p:ph type="body" idx="4294967295"/>
+            <p:ph type="body" idx="1"/>
           </p:nvPr>
         </p:nvSpPr>
         <p:spPr>
           <a:xfrm>
-            <a:off x="852983" y="2157015"/>
-            <a:ext cx="11392993" cy="6969424"/>
+            <a:off x="999579" y="2476500"/>
+            <a:ext cx="11099801" cy="6706146"/>
           </a:xfrm>
           <a:prstGeom prst="rect">
             <a:avLst/>
           </a:prstGeom>
         </p:spPr>
         <p:txBody>
-          <a:bodyPr anchor="t"/>
+          <a:bodyPr/>
           <a:lstStyle/>
           <a:p>
-            <a:pPr marL="0" indent="0" algn="ctr">
+            <a:pPr marL="422275" indent="-422275" defTabSz="554990">
+              <a:spcBef>
+                <a:spcPts val="3900"/>
+              </a:spcBef>
+              <a:defRPr sz="2850"/>
+            </a:pPr>
+            <a:r>
+              <a:t>A </a:t>
+            </a:r>
+            <a:r>
+              <a:rPr b="1">
+                <a:latin typeface="+mj-lt"/>
+                <a:ea typeface="+mj-ea"/>
+                <a:cs typeface="+mj-cs"/>
+                <a:sym typeface="Helvetica"/>
+              </a:rPr>
+              <a:t>gradient</a:t>
+            </a:r>
+            <a:r>
+              <a:t> is a transition from one color to another.</a:t>
+            </a:r>
+          </a:p>
+          <a:p>
+            <a:pPr marL="422275" indent="-422275" defTabSz="554990">
+              <a:spcBef>
+                <a:spcPts val="2800"/>
+              </a:spcBef>
+              <a:defRPr sz="2850"/>
+            </a:pPr>
+            <a:r>
+              <a:rPr b="1">
+                <a:latin typeface="+mj-lt"/>
+                <a:ea typeface="+mj-ea"/>
+                <a:cs typeface="+mj-cs"/>
+                <a:sym typeface="Helvetica"/>
+              </a:rPr>
+              <a:t>Linear gradients</a:t>
+            </a:r>
+            <a:r>
+              <a:t> change colors along a line.</a:t>
+            </a:r>
+          </a:p>
+          <a:p>
+            <a:pPr marL="422275" indent="-422275" defTabSz="554990">
+              <a:spcBef>
+                <a:spcPts val="2800"/>
+              </a:spcBef>
+              <a:defRPr sz="2850"/>
+            </a:pPr>
+            <a:r>
+              <a:rPr b="1">
+                <a:latin typeface="+mj-lt"/>
+                <a:ea typeface="+mj-ea"/>
+                <a:cs typeface="+mj-cs"/>
+                <a:sym typeface="Helvetica"/>
+              </a:rPr>
+              <a:t>Radial gradients</a:t>
+            </a:r>
+            <a:r>
+              <a:t> start at a point and spread outward in a circular or elliptical shape.</a:t>
+            </a:r>
+          </a:p>
+          <a:p>
+            <a:pPr marL="422275" indent="-422275" defTabSz="554990">
+              <a:spcBef>
+                <a:spcPts val="2800"/>
+              </a:spcBef>
+              <a:defRPr sz="2850"/>
+            </a:pPr>
+            <a:r>
+              <a:t>You can generate a gradient image for use as a background using </a:t>
+            </a:r>
+            <a:r>
+              <a:rPr b="1">
+                <a:latin typeface="Courier"/>
+                <a:ea typeface="Courier"/>
+                <a:cs typeface="Courier"/>
+                <a:sym typeface="Courier"/>
+              </a:rPr>
+              <a:t>linear-gradient()</a:t>
+            </a:r>
+            <a:r>
+              <a:t> and </a:t>
+            </a:r>
+            <a:r>
+              <a:rPr b="1">
+                <a:latin typeface="Courier"/>
+                <a:ea typeface="Courier"/>
+                <a:cs typeface="Courier"/>
+                <a:sym typeface="Courier"/>
+              </a:rPr>
+              <a:t>radial-gradient()</a:t>
+            </a:r>
+            <a:r>
+              <a:t> notation.</a:t>
+            </a:r>
+          </a:p>
+          <a:p>
+            <a:pPr marL="0" indent="0" defTabSz="554990">
+              <a:spcBef>
+                <a:spcPts val="3900"/>
+              </a:spcBef>
               <a:buSzTx/>
               <a:buNone/>
-              <a:defRPr sz="3000" b="1">
-                <a:solidFill>
-                  <a:schemeClr val="accent1"/>
-                </a:solidFill>
+              <a:defRPr sz="2850" b="1">
+                <a:latin typeface="+mj-lt"/>
+                <a:ea typeface="+mj-ea"/>
+                <a:cs typeface="+mj-cs"/>
+                <a:sym typeface="Helvetica"/>
+              </a:defRPr>
+            </a:pPr>
+            <a:r>
+              <a:t>Example:</a:t>
+            </a:r>
+          </a:p>
+          <a:p>
+            <a:pPr marL="0" lvl="1" indent="217170" defTabSz="554990">
+              <a:spcBef>
+                <a:spcPts val="1100"/>
+              </a:spcBef>
+              <a:buSzTx/>
+              <a:buNone/>
+              <a:defRPr sz="2470">
                 <a:latin typeface="Courier"/>
                 <a:ea typeface="Courier"/>
                 <a:cs typeface="Courier"/>
@@ -5346,211 +5721,26 @@
               </a:defRPr>
             </a:pPr>
             <a:r>
-              <a:t>background-position</a:t>
-            </a:r>
-          </a:p>
-          <a:p>
-            <a:pPr marL="0" indent="0">
+              <a:t>#banner {</a:t>
+            </a:r>
+          </a:p>
+          <a:p>
+            <a:pPr marL="0" lvl="1" indent="217170" defTabSz="554990">
               <a:spcBef>
-                <a:spcPts val="2400"/>
+                <a:spcPts val="0"/>
               </a:spcBef>
               <a:buSzTx/>
               <a:buNone/>
-              <a:defRPr sz="3000"/>
-            </a:pPr>
-            <a:r>
-              <a:rPr b="1">
-                <a:latin typeface="+mj-lt"/>
-                <a:ea typeface="+mj-ea"/>
-                <a:cs typeface="+mj-cs"/>
-                <a:sym typeface="Helvetica"/>
-              </a:rPr>
-              <a:t>Values:</a:t>
-            </a:r>
-            <a:r>
-              <a:t> </a:t>
-            </a:r>
-            <a:br/>
-            <a:r>
-              <a:rPr i="1"/>
-              <a:t>Length</a:t>
-            </a:r>
-            <a:r>
-              <a:rPr>
-                <a:latin typeface="+mj-lt"/>
-                <a:ea typeface="+mj-ea"/>
-                <a:cs typeface="+mj-cs"/>
-                <a:sym typeface="Helvetica"/>
-              </a:rPr>
-              <a:t>, </a:t>
-            </a:r>
-            <a:r>
-              <a:rPr i="1"/>
-              <a:t>percentage</a:t>
-            </a:r>
-            <a:r>
-              <a:rPr>
-                <a:latin typeface="+mj-lt"/>
-                <a:ea typeface="+mj-ea"/>
-                <a:cs typeface="+mj-cs"/>
-                <a:sym typeface="Helvetica"/>
-              </a:rPr>
-              <a:t>, </a:t>
-            </a:r>
-            <a:r>
-              <a:rPr>
-                <a:latin typeface="Courier"/>
-                <a:ea typeface="Courier"/>
-                <a:cs typeface="Courier"/>
-                <a:sym typeface="Courier"/>
-              </a:rPr>
-              <a:t>left</a:t>
-            </a:r>
-            <a:r>
-              <a:rPr>
-                <a:latin typeface="+mj-lt"/>
-                <a:ea typeface="+mj-ea"/>
-                <a:cs typeface="+mj-cs"/>
-                <a:sym typeface="Helvetica"/>
-              </a:rPr>
-              <a:t>, </a:t>
-            </a:r>
-            <a:r>
-              <a:rPr>
-                <a:latin typeface="Courier"/>
-                <a:ea typeface="Courier"/>
-                <a:cs typeface="Courier"/>
-                <a:sym typeface="Courier"/>
-              </a:rPr>
-              <a:t>center</a:t>
-            </a:r>
-            <a:r>
-              <a:rPr>
-                <a:latin typeface="+mj-lt"/>
-                <a:ea typeface="+mj-ea"/>
-                <a:cs typeface="+mj-cs"/>
-                <a:sym typeface="Helvetica"/>
-              </a:rPr>
-              <a:t>, </a:t>
-            </a:r>
-            <a:r>
-              <a:rPr>
-                <a:latin typeface="Courier"/>
-                <a:ea typeface="Courier"/>
-                <a:cs typeface="Courier"/>
-                <a:sym typeface="Courier"/>
-              </a:rPr>
-              <a:t>right</a:t>
-            </a:r>
-            <a:r>
-              <a:rPr>
-                <a:latin typeface="+mj-lt"/>
-                <a:ea typeface="+mj-ea"/>
-                <a:cs typeface="+mj-cs"/>
-                <a:sym typeface="Helvetica"/>
-              </a:rPr>
-              <a:t>, </a:t>
-            </a:r>
-            <a:r>
-              <a:rPr>
-                <a:latin typeface="Courier"/>
-                <a:ea typeface="Courier"/>
-                <a:cs typeface="Courier"/>
-                <a:sym typeface="Courier"/>
-              </a:rPr>
-              <a:t>top</a:t>
-            </a:r>
-            <a:r>
-              <a:rPr>
-                <a:latin typeface="+mj-lt"/>
-                <a:ea typeface="+mj-ea"/>
-                <a:cs typeface="+mj-cs"/>
-                <a:sym typeface="Helvetica"/>
-              </a:rPr>
-              <a:t>, </a:t>
-            </a:r>
-            <a:r>
-              <a:rPr>
-                <a:latin typeface="Courier"/>
-                <a:ea typeface="Courier"/>
-                <a:cs typeface="Courier"/>
-                <a:sym typeface="Courier"/>
-              </a:rPr>
-              <a:t>bottom</a:t>
-            </a:r>
-            <a:endParaRPr>
-              <a:latin typeface="+mj-lt"/>
-              <a:ea typeface="+mj-ea"/>
-              <a:cs typeface="+mj-cs"/>
-              <a:sym typeface="Helvetica"/>
-            </a:endParaRPr>
-          </a:p>
-          <a:p>
-            <a:pPr marL="0" indent="0">
-              <a:spcBef>
-                <a:spcPts val="3000"/>
-              </a:spcBef>
-              <a:buSzTx/>
-              <a:buNone/>
-              <a:defRPr sz="3000"/>
-            </a:pPr>
-            <a:r>
-              <a:t>Specifies the position of the</a:t>
-            </a:r>
-            <a:r>
-              <a:rPr b="1">
-                <a:latin typeface="+mj-lt"/>
-                <a:ea typeface="+mj-ea"/>
-                <a:cs typeface="+mj-cs"/>
-                <a:sym typeface="Helvetica"/>
-              </a:rPr>
-              <a:t> origin image</a:t>
-            </a:r>
-            <a:r>
-              <a:t>, the first image that is placed in the background from which tiling images extend.</a:t>
-            </a:r>
-          </a:p>
-          <a:p>
-            <a:pPr marL="0" indent="0">
-              <a:spcBef>
-                <a:spcPts val="3000"/>
-              </a:spcBef>
-              <a:buSzTx/>
-              <a:buNone/>
-              <a:defRPr sz="3000" b="1">
-                <a:latin typeface="+mj-lt"/>
-                <a:ea typeface="+mj-ea"/>
-                <a:cs typeface="+mj-cs"/>
-                <a:sym typeface="Helvetica"/>
-              </a:defRPr>
-            </a:pPr>
-            <a:r>
-              <a:t>Examples </a:t>
-            </a:r>
-            <a:r>
-              <a:rPr b="0">
-                <a:latin typeface="+mn-lt"/>
-                <a:ea typeface="+mn-ea"/>
-                <a:cs typeface="+mn-cs"/>
-                <a:sym typeface="Helvetica Light"/>
-              </a:rPr>
-              <a:t>(horizontal position goes first):</a:t>
-            </a:r>
-          </a:p>
-          <a:p>
-            <a:pPr marL="0" indent="0" algn="ctr">
-              <a:spcBef>
-                <a:spcPts val="3000"/>
-              </a:spcBef>
-              <a:buSzTx/>
-              <a:buNone/>
-              <a:defRPr sz="2700">
+              <a:defRPr sz="2470">
                 <a:latin typeface="Courier"/>
                 <a:ea typeface="Courier"/>
                 <a:cs typeface="Courier"/>
                 <a:sym typeface="Courier"/>
               </a:defRPr>
             </a:pPr>
+            <a:r>
+              <a:t>  background-image: </a:t>
+            </a:r>
             <a:r>
               <a:rPr b="1">
                 <a:solidFill>
@@ -5561,20 +5751,20 @@
                   </a:schemeClr>
                 </a:solidFill>
               </a:rPr>
-              <a:t>background-position:</a:t>
-            </a:r>
-            <a:r>
-              <a:t> left bottom;</a:t>
-            </a:r>
-          </a:p>
-          <a:p>
-            <a:pPr marL="0" indent="0" algn="ctr">
+              <a:t>linear-gradient(180deg, aqua, green)</a:t>
+            </a:r>
+            <a:r>
+              <a:t>; </a:t>
+            </a:r>
+          </a:p>
+          <a:p>
+            <a:pPr marL="0" lvl="1" indent="217170" defTabSz="554990">
               <a:spcBef>
-                <a:spcPts val="3000"/>
+                <a:spcPts val="0"/>
               </a:spcBef>
               <a:buSzTx/>
               <a:buNone/>
-              <a:defRPr sz="2700">
+              <a:defRPr sz="2470">
                 <a:latin typeface="Courier"/>
                 <a:ea typeface="Courier"/>
                 <a:cs typeface="Courier"/>
@@ -5582,49 +5772,7 @@
               </a:defRPr>
             </a:pPr>
             <a:r>
-              <a:rPr b="1">
-                <a:solidFill>
-                  <a:schemeClr val="accent4">
-                    <a:hueOff val="384618"/>
-                    <a:satOff val="3869"/>
-                    <a:lumOff val="5802"/>
-                  </a:schemeClr>
-                </a:solidFill>
-              </a:rPr>
-              <a:t>background-position:</a:t>
-            </a:r>
-            <a:r>
-              <a:t> 300px 100px;</a:t>
-            </a:r>
-          </a:p>
-          <a:p>
-            <a:pPr marL="0" indent="0" algn="ctr">
-              <a:spcBef>
-                <a:spcPts val="3000"/>
-              </a:spcBef>
-              <a:buSzTx/>
-              <a:buNone/>
-              <a:defRPr sz="2700">
-                <a:latin typeface="Courier"/>
-                <a:ea typeface="Courier"/>
-                <a:cs typeface="Courier"/>
-                <a:sym typeface="Courier"/>
-              </a:defRPr>
-            </a:pPr>
-            <a:r>
-              <a:rPr b="1">
-                <a:solidFill>
-                  <a:schemeClr val="accent4">
-                    <a:hueOff val="384618"/>
-                    <a:satOff val="3869"/>
-                    <a:lumOff val="5802"/>
-                  </a:schemeClr>
-                </a:solidFill>
-              </a:rPr>
-              <a:t>background-position:</a:t>
-            </a:r>
-            <a:r>
-              <a:t> 25% 100%;</a:t>
+              <a:t>}</a:t>
             </a:r>
           </a:p>
         </p:txBody>
@@ -5657,7 +5805,7 @@
       </p:grpSpPr>
       <p:sp>
         <p:nvSpPr>
-          <p:cNvPr id="164" name="Background Position (cont’d)"/>
+          <p:cNvPr id="185" name="Linear Gradient"/>
           <p:cNvSpPr txBox="1">
             <a:spLocks noGrp="1"/>
           </p:cNvSpPr>
@@ -5666,31 +5814,139 @@
           </p:nvPr>
         </p:nvSpPr>
         <p:spPr>
+          <a:prstGeom prst="rect">
+            <a:avLst/>
+          </a:prstGeom>
+        </p:spPr>
+        <p:txBody>
+          <a:bodyPr/>
+          <a:lstStyle/>
+          <a:p>
+            <a:r>
+              <a:t>Linear Gradient</a:t>
+            </a:r>
+          </a:p>
+        </p:txBody>
+      </p:sp>
+      <p:sp>
+        <p:nvSpPr>
+          <p:cNvPr id="186" name="The linear-gradient() notation provides the angle of a gradient line and the colors the line passes through.…"/>
+          <p:cNvSpPr txBox="1">
+            <a:spLocks noGrp="1"/>
+          </p:cNvSpPr>
+          <p:nvPr>
+            <p:ph type="body" sz="half" idx="1"/>
+          </p:nvPr>
+        </p:nvSpPr>
+        <p:spPr>
           <a:xfrm>
-            <a:off x="952500" y="444500"/>
-            <a:ext cx="11099800" cy="1096070"/>
+            <a:off x="850900" y="3145432"/>
+            <a:ext cx="5903814" cy="5215336"/>
           </a:xfrm>
           <a:prstGeom prst="rect">
             <a:avLst/>
           </a:prstGeom>
         </p:spPr>
         <p:txBody>
-          <a:bodyPr/>
-          <a:lstStyle>
-            <a:lvl1pPr>
-              <a:defRPr sz="3600"/>
-            </a:lvl1pPr>
-          </a:lstStyle>
-          <a:p>
-            <a:r>
-              <a:t>Background Position (cont’d)</a:t>
+          <a:bodyPr anchor="t"/>
+          <a:lstStyle/>
+          <a:p>
+            <a:pPr marL="0" indent="0">
+              <a:buSzTx/>
+              <a:buNone/>
+              <a:defRPr sz="3000"/>
+            </a:pPr>
+            <a:r>
+              <a:t>The </a:t>
+            </a:r>
+            <a:r>
+              <a:rPr b="1">
+                <a:latin typeface="Courier"/>
+                <a:ea typeface="Courier"/>
+                <a:cs typeface="Courier"/>
+                <a:sym typeface="Courier"/>
+              </a:rPr>
+              <a:t>linear-gradient()</a:t>
+            </a:r>
+            <a:r>
+              <a:t> notation provides the angle of a gradient line and the colors the line passes through.</a:t>
+            </a:r>
+          </a:p>
+          <a:p>
+            <a:pPr marL="0" indent="0">
+              <a:buSzTx/>
+              <a:buNone/>
+              <a:defRPr sz="3000"/>
+            </a:pPr>
+            <a:r>
+              <a:t>It is specified in degrees (</a:t>
+            </a:r>
+            <a:r>
+              <a:rPr>
+                <a:latin typeface="Courier"/>
+                <a:ea typeface="Courier"/>
+                <a:cs typeface="Courier"/>
+                <a:sym typeface="Courier"/>
+              </a:rPr>
+              <a:t>deg</a:t>
+            </a:r>
+            <a:r>
+              <a:t>) or keywords (</a:t>
+            </a:r>
+            <a:r>
+              <a:rPr>
+                <a:latin typeface="Courier"/>
+                <a:ea typeface="Courier"/>
+                <a:cs typeface="Courier"/>
+                <a:sym typeface="Courier"/>
+              </a:rPr>
+              <a:t>to top</a:t>
+            </a:r>
+            <a:r>
+              <a:t>, </a:t>
+            </a:r>
+            <a:r>
+              <a:rPr>
+                <a:latin typeface="Courier"/>
+                <a:ea typeface="Courier"/>
+                <a:cs typeface="Courier"/>
+                <a:sym typeface="Courier"/>
+              </a:rPr>
+              <a:t>to right</a:t>
+            </a:r>
+            <a:r>
+              <a:t>, </a:t>
+            </a:r>
+            <a:r>
+              <a:rPr>
+                <a:latin typeface="Courier"/>
+                <a:ea typeface="Courier"/>
+                <a:cs typeface="Courier"/>
+                <a:sym typeface="Courier"/>
+              </a:rPr>
+              <a:t>to bottom</a:t>
+            </a:r>
+            <a:r>
+              <a:t>, </a:t>
+            </a:r>
+            <a:r>
+              <a:rPr>
+                <a:latin typeface="Courier"/>
+                <a:ea typeface="Courier"/>
+                <a:cs typeface="Courier"/>
+                <a:sym typeface="Courier"/>
+              </a:rPr>
+              <a:t>to left</a:t>
+            </a:r>
+            <a:r>
+              <a:t>).</a:t>
             </a:r>
           </a:p>
         </p:txBody>
       </p:sp>
       <p:pic>
         <p:nvPicPr>
-          <p:cNvPr id="165" name="lwd5_1323_position.png" descr="lwd5_1323_position.png"/>
+          <p:cNvPr id="187" name="lwd5_1331_linear.png" descr="lwd5_1331_linear.png"/>
           <p:cNvPicPr>
             <a:picLocks noChangeAspect="1"/>
           </p:cNvPicPr>
@@ -5704,8 +5960,8 @@
         </p:blipFill>
         <p:spPr>
           <a:xfrm>
-            <a:off x="2482850" y="2087909"/>
-            <a:ext cx="8039100" cy="6718301"/>
+            <a:off x="7068335" y="2286956"/>
+            <a:ext cx="5447515" cy="6932288"/>
           </a:xfrm>
           <a:prstGeom prst="rect">
             <a:avLst/>
@@ -5743,7 +5999,7 @@
       </p:grpSpPr>
       <p:sp>
         <p:nvSpPr>
-          <p:cNvPr id="167" name="Background Attachment"/>
+          <p:cNvPr id="189" name="Radial Gradients"/>
           <p:cNvSpPr txBox="1">
             <a:spLocks noGrp="1"/>
           </p:cNvSpPr>
@@ -5761,142 +6017,63 @@
           <a:lstStyle/>
           <a:p>
             <a:r>
-              <a:t>Background Attachment</a:t>
+              <a:t>Radial Gradients</a:t>
             </a:r>
           </a:p>
         </p:txBody>
       </p:sp>
       <p:sp>
         <p:nvSpPr>
-          <p:cNvPr id="168" name="background-attachment…"/>
+          <p:cNvPr id="190" name="The radial-gradient() notation provides the color values and optional size, shape, and position information."/>
           <p:cNvSpPr txBox="1">
             <a:spLocks noGrp="1"/>
           </p:cNvSpPr>
           <p:nvPr>
-            <p:ph type="body" idx="4294967295"/>
+            <p:ph type="body" sz="quarter" idx="4294967295"/>
           </p:nvPr>
         </p:nvSpPr>
         <p:spPr>
           <a:xfrm>
-            <a:off x="852983" y="2268388"/>
-            <a:ext cx="11392993" cy="6969424"/>
+            <a:off x="698500" y="2540000"/>
+            <a:ext cx="5412135" cy="2281337"/>
           </a:xfrm>
           <a:prstGeom prst="rect">
             <a:avLst/>
           </a:prstGeom>
         </p:spPr>
         <p:txBody>
-          <a:bodyPr anchor="t"/>
+          <a:bodyPr/>
           <a:lstStyle/>
           <a:p>
-            <a:pPr marL="0" indent="0" algn="ctr">
+            <a:pPr marL="0" indent="0" defTabSz="566674">
+              <a:spcBef>
+                <a:spcPts val="4000"/>
+              </a:spcBef>
               <a:buSzTx/>
               <a:buNone/>
-              <a:defRPr sz="3000" b="1">
-                <a:solidFill>
-                  <a:schemeClr val="accent1"/>
-                </a:solidFill>
+              <a:defRPr sz="2910"/>
+            </a:pPr>
+            <a:r>
+              <a:t>The </a:t>
+            </a:r>
+            <a:r>
+              <a:rPr b="1">
                 <a:latin typeface="Courier"/>
                 <a:ea typeface="Courier"/>
                 <a:cs typeface="Courier"/>
                 <a:sym typeface="Courier"/>
-              </a:defRPr>
-            </a:pPr>
-            <a:r>
-              <a:t>background-attachment</a:t>
-            </a:r>
-          </a:p>
-          <a:p>
-            <a:pPr marL="0" indent="0">
-              <a:spcBef>
-                <a:spcPts val="2400"/>
-              </a:spcBef>
-              <a:buSzTx/>
-              <a:buNone/>
-              <a:defRPr sz="3000"/>
-            </a:pPr>
-            <a:r>
-              <a:rPr b="1">
-                <a:latin typeface="+mj-lt"/>
-                <a:ea typeface="+mj-ea"/>
-                <a:cs typeface="+mj-cs"/>
-                <a:sym typeface="Helvetica"/>
-              </a:rPr>
-              <a:t>Values:</a:t>
-            </a:r>
-            <a:r>
-              <a:t> </a:t>
-            </a:r>
-            <a:r>
-              <a:rPr>
-                <a:latin typeface="Courier"/>
-                <a:ea typeface="Courier"/>
-                <a:cs typeface="Courier"/>
-                <a:sym typeface="Courier"/>
-              </a:rPr>
-              <a:t>scroll</a:t>
-            </a:r>
-            <a:r>
-              <a:rPr>
-                <a:latin typeface="+mj-lt"/>
-                <a:ea typeface="+mj-ea"/>
-                <a:cs typeface="+mj-cs"/>
-                <a:sym typeface="Helvetica"/>
-              </a:rPr>
-              <a:t>, </a:t>
-            </a:r>
-            <a:r>
-              <a:rPr>
-                <a:latin typeface="Courier"/>
-                <a:ea typeface="Courier"/>
-                <a:cs typeface="Courier"/>
-                <a:sym typeface="Courier"/>
-              </a:rPr>
-              <a:t>fixed</a:t>
-            </a:r>
-            <a:r>
-              <a:rPr>
-                <a:latin typeface="+mj-lt"/>
-                <a:ea typeface="+mj-ea"/>
-                <a:cs typeface="+mj-cs"/>
-                <a:sym typeface="Helvetica"/>
-              </a:rPr>
-              <a:t>, </a:t>
-            </a:r>
-            <a:r>
-              <a:rPr>
-                <a:latin typeface="Courier"/>
-                <a:ea typeface="Courier"/>
-                <a:cs typeface="Courier"/>
-                <a:sym typeface="Courier"/>
-              </a:rPr>
-              <a:t>local</a:t>
-            </a:r>
-            <a:endParaRPr>
-              <a:latin typeface="+mj-lt"/>
-              <a:ea typeface="+mj-ea"/>
-              <a:cs typeface="+mj-cs"/>
-              <a:sym typeface="Helvetica"/>
-            </a:endParaRPr>
-          </a:p>
-          <a:p>
-            <a:pPr marL="0" indent="0">
-              <a:spcBef>
-                <a:spcPts val="2400"/>
-              </a:spcBef>
-              <a:buSzTx/>
-              <a:buNone/>
-              <a:defRPr sz="3000"/>
-            </a:pPr>
-            <a:r>
-              <a:t>Specifies whether the background image scrolls with the content or stays in a fixed position relative to the viewport.</a:t>
+              </a:rPr>
+              <a:t>radial-gradient()</a:t>
+            </a:r>
+            <a:r>
+              <a:t> notation provides the color values and optional size, shape, and position information.</a:t>
             </a:r>
           </a:p>
         </p:txBody>
       </p:sp>
       <p:pic>
         <p:nvPicPr>
-          <p:cNvPr id="169" name="lwd5_1326_attachment.png" descr="lwd5_1326_attachment.png"/>
+          <p:cNvPr id="191" name="lwd5_1334_radialexamples.png" descr="lwd5_1334_radialexamples.png"/>
           <p:cNvPicPr>
             <a:picLocks noChangeAspect="1"/>
           </p:cNvPicPr>
@@ -5910,1115 +6087,8 @@
         </p:blipFill>
         <p:spPr>
           <a:xfrm>
-            <a:off x="1469479" y="5187950"/>
-            <a:ext cx="10160001" cy="3975100"/>
-          </a:xfrm>
-          <a:prstGeom prst="rect">
-            <a:avLst/>
-          </a:prstGeom>
-          <a:ln w="12700">
-            <a:miter lim="400000"/>
-          </a:ln>
-        </p:spPr>
-      </p:pic>
-    </p:spTree>
-  </p:cSld>
-  <p:clrMapOvr>
-    <a:masterClrMapping/>
-  </p:clrMapOvr>
-  <p:transition spd="med"/>
-</p:sld>
-</file>
-
-<file path=ppt/slides/slide25.xml><?xml version="1.0" encoding="utf-8"?>
-<p:sld xmlns:a="http://schemas.openxmlformats.org/drawingml/2006/main" xmlns:r="http://schemas.openxmlformats.org/officeDocument/2006/relationships" xmlns:p="http://schemas.openxmlformats.org/presentationml/2006/main">
-  <p:cSld>
-    <p:spTree>
-      <p:nvGrpSpPr>
-        <p:cNvPr id="1" name=""/>
-        <p:cNvGrpSpPr/>
-        <p:nvPr/>
-      </p:nvGrpSpPr>
-      <p:grpSpPr>
-        <a:xfrm>
-          <a:off x="0" y="0"/>
-          <a:ext cx="0" cy="0"/>
-          <a:chOff x="0" y="0"/>
-          <a:chExt cx="0" cy="0"/>
-        </a:xfrm>
-      </p:grpSpPr>
-      <p:sp>
-        <p:nvSpPr>
-          <p:cNvPr id="171" name="Background Size"/>
-          <p:cNvSpPr txBox="1">
-            <a:spLocks noGrp="1"/>
-          </p:cNvSpPr>
-          <p:nvPr>
-            <p:ph type="title"/>
-          </p:nvPr>
-        </p:nvSpPr>
-        <p:spPr>
-          <a:prstGeom prst="rect">
-            <a:avLst/>
-          </a:prstGeom>
-        </p:spPr>
-        <p:txBody>
-          <a:bodyPr/>
-          <a:lstStyle/>
-          <a:p>
-            <a:r>
-              <a:t>Background Size</a:t>
-            </a:r>
-          </a:p>
-        </p:txBody>
-      </p:sp>
-      <p:sp>
-        <p:nvSpPr>
-          <p:cNvPr id="172" name="background-size…"/>
-          <p:cNvSpPr txBox="1">
-            <a:spLocks noGrp="1"/>
-          </p:cNvSpPr>
-          <p:nvPr>
-            <p:ph type="body" idx="4294967295"/>
-          </p:nvPr>
-        </p:nvSpPr>
-        <p:spPr>
-          <a:xfrm>
-            <a:off x="852983" y="2157015"/>
-            <a:ext cx="11392993" cy="6969424"/>
-          </a:xfrm>
-          <a:prstGeom prst="rect">
-            <a:avLst/>
-          </a:prstGeom>
-        </p:spPr>
-        <p:txBody>
-          <a:bodyPr anchor="t"/>
-          <a:lstStyle/>
-          <a:p>
-            <a:pPr marL="0" indent="0" algn="ctr">
-              <a:buSzTx/>
-              <a:buNone/>
-              <a:defRPr sz="3000" b="1">
-                <a:solidFill>
-                  <a:schemeClr val="accent1"/>
-                </a:solidFill>
-                <a:latin typeface="Courier"/>
-                <a:ea typeface="Courier"/>
-                <a:cs typeface="Courier"/>
-                <a:sym typeface="Courier"/>
-              </a:defRPr>
-            </a:pPr>
-            <a:r>
-              <a:t>background-size</a:t>
-            </a:r>
-          </a:p>
-          <a:p>
-            <a:pPr marL="0" indent="0">
-              <a:spcBef>
-                <a:spcPts val="2400"/>
-              </a:spcBef>
-              <a:buSzTx/>
-              <a:buNone/>
-              <a:defRPr sz="3000"/>
-            </a:pPr>
-            <a:r>
-              <a:rPr b="1">
-                <a:latin typeface="+mj-lt"/>
-                <a:ea typeface="+mj-ea"/>
-                <a:cs typeface="+mj-cs"/>
-                <a:sym typeface="Helvetica"/>
-              </a:rPr>
-              <a:t>Values:</a:t>
-            </a:r>
-            <a:r>
-              <a:t> </a:t>
-            </a:r>
-            <a:br/>
-            <a:r>
-              <a:rPr i="1"/>
-              <a:t>Length</a:t>
-            </a:r>
-            <a:r>
-              <a:rPr>
-                <a:latin typeface="+mj-lt"/>
-                <a:ea typeface="+mj-ea"/>
-                <a:cs typeface="+mj-cs"/>
-                <a:sym typeface="Helvetica"/>
-              </a:rPr>
-              <a:t>, </a:t>
-            </a:r>
-            <a:r>
-              <a:rPr i="1"/>
-              <a:t>percentage</a:t>
-            </a:r>
-            <a:r>
-              <a:rPr>
-                <a:latin typeface="+mj-lt"/>
-                <a:ea typeface="+mj-ea"/>
-                <a:cs typeface="+mj-cs"/>
-                <a:sym typeface="Helvetica"/>
-              </a:rPr>
-              <a:t>, </a:t>
-            </a:r>
-            <a:r>
-              <a:rPr>
-                <a:latin typeface="Courier"/>
-                <a:ea typeface="Courier"/>
-                <a:cs typeface="Courier"/>
-                <a:sym typeface="Courier"/>
-              </a:rPr>
-              <a:t>auto</a:t>
-            </a:r>
-            <a:r>
-              <a:rPr>
-                <a:latin typeface="+mj-lt"/>
-                <a:ea typeface="+mj-ea"/>
-                <a:cs typeface="+mj-cs"/>
-                <a:sym typeface="Helvetica"/>
-              </a:rPr>
-              <a:t>, </a:t>
-            </a:r>
-            <a:r>
-              <a:rPr>
-                <a:latin typeface="Courier"/>
-                <a:ea typeface="Courier"/>
-                <a:cs typeface="Courier"/>
-                <a:sym typeface="Courier"/>
-              </a:rPr>
-              <a:t>cover</a:t>
-            </a:r>
-            <a:r>
-              <a:rPr>
-                <a:latin typeface="+mj-lt"/>
-                <a:ea typeface="+mj-ea"/>
-                <a:cs typeface="+mj-cs"/>
-                <a:sym typeface="Helvetica"/>
-              </a:rPr>
-              <a:t>, </a:t>
-            </a:r>
-            <a:r>
-              <a:rPr>
-                <a:latin typeface="Courier"/>
-                <a:ea typeface="Courier"/>
-                <a:cs typeface="Courier"/>
-                <a:sym typeface="Courier"/>
-              </a:rPr>
-              <a:t>contain</a:t>
-            </a:r>
-            <a:endParaRPr>
-              <a:latin typeface="+mj-lt"/>
-              <a:ea typeface="+mj-ea"/>
-              <a:cs typeface="+mj-cs"/>
-              <a:sym typeface="Helvetica"/>
-            </a:endParaRPr>
-          </a:p>
-          <a:p>
-            <a:pPr marL="0" indent="0">
-              <a:spcBef>
-                <a:spcPts val="3000"/>
-              </a:spcBef>
-              <a:buSzTx/>
-              <a:buNone/>
-              <a:defRPr sz="3000"/>
-            </a:pPr>
-            <a:r>
-              <a:t>Specifies the size of the tiling image:</a:t>
-            </a:r>
-          </a:p>
-        </p:txBody>
-      </p:sp>
-      <p:pic>
-        <p:nvPicPr>
-          <p:cNvPr id="173" name="lwd5_1327_target.png" descr="lwd5_1327_target.png"/>
-          <p:cNvPicPr>
-            <a:picLocks noChangeAspect="1"/>
-          </p:cNvPicPr>
-          <p:nvPr/>
-        </p:nvPicPr>
-        <p:blipFill>
-          <a:blip r:embed="rId2"/>
-          <a:stretch>
-            <a:fillRect/>
-          </a:stretch>
-        </p:blipFill>
-        <p:spPr>
-          <a:xfrm>
-            <a:off x="9110051" y="3878325"/>
-            <a:ext cx="2894549" cy="1554480"/>
-          </a:xfrm>
-          <a:prstGeom prst="rect">
-            <a:avLst/>
-          </a:prstGeom>
-          <a:ln w="12700">
-            <a:miter lim="400000"/>
-          </a:ln>
-        </p:spPr>
-      </p:pic>
-      <p:pic>
-        <p:nvPicPr>
-          <p:cNvPr id="174" name="lwd5_1328_covercontain.png" descr="lwd5_1328_covercontain.png"/>
-          <p:cNvPicPr>
-            <a:picLocks noChangeAspect="1"/>
-          </p:cNvPicPr>
-          <p:nvPr/>
-        </p:nvPicPr>
-        <p:blipFill>
-          <a:blip r:embed="rId3"/>
-          <a:stretch>
-            <a:fillRect/>
-          </a:stretch>
-        </p:blipFill>
-        <p:spPr>
-          <a:xfrm>
-            <a:off x="1013479" y="5732778"/>
-            <a:ext cx="10977842" cy="3320798"/>
-          </a:xfrm>
-          <a:prstGeom prst="rect">
-            <a:avLst/>
-          </a:prstGeom>
-          <a:ln w="12700">
-            <a:miter lim="400000"/>
-          </a:ln>
-        </p:spPr>
-      </p:pic>
-    </p:spTree>
-  </p:cSld>
-  <p:clrMapOvr>
-    <a:masterClrMapping/>
-  </p:clrMapOvr>
-  <p:transition spd="med"/>
-</p:sld>
-</file>
-
-<file path=ppt/slides/slide26.xml><?xml version="1.0" encoding="utf-8"?>
-<p:sld xmlns:a="http://schemas.openxmlformats.org/drawingml/2006/main" xmlns:r="http://schemas.openxmlformats.org/officeDocument/2006/relationships" xmlns:p="http://schemas.openxmlformats.org/presentationml/2006/main">
-  <p:cSld>
-    <p:spTree>
-      <p:nvGrpSpPr>
-        <p:cNvPr id="1" name=""/>
-        <p:cNvGrpSpPr/>
-        <p:nvPr/>
-      </p:nvGrpSpPr>
-      <p:grpSpPr>
-        <a:xfrm>
-          <a:off x="0" y="0"/>
-          <a:ext cx="0" cy="0"/>
-          <a:chOff x="0" y="0"/>
-          <a:chExt cx="0" cy="0"/>
-        </a:xfrm>
-      </p:grpSpPr>
-      <p:sp>
-        <p:nvSpPr>
-          <p:cNvPr id="176" name="Shorthand background Property"/>
-          <p:cNvSpPr txBox="1">
-            <a:spLocks noGrp="1"/>
-          </p:cNvSpPr>
-          <p:nvPr>
-            <p:ph type="title"/>
-          </p:nvPr>
-        </p:nvSpPr>
-        <p:spPr>
-          <a:prstGeom prst="rect">
-            <a:avLst/>
-          </a:prstGeom>
-        </p:spPr>
-        <p:txBody>
-          <a:bodyPr/>
-          <a:lstStyle/>
-          <a:p>
-            <a:r>
-              <a:t>Shorthand background Property</a:t>
-            </a:r>
-          </a:p>
-        </p:txBody>
-      </p:sp>
-      <p:sp>
-        <p:nvSpPr>
-          <p:cNvPr id="177" name="background…"/>
-          <p:cNvSpPr txBox="1">
-            <a:spLocks noGrp="1"/>
-          </p:cNvSpPr>
-          <p:nvPr>
-            <p:ph type="body" idx="1"/>
-          </p:nvPr>
-        </p:nvSpPr>
-        <p:spPr>
-          <a:xfrm>
-            <a:off x="952500" y="2120900"/>
-            <a:ext cx="11099800" cy="6885286"/>
-          </a:xfrm>
-          <a:prstGeom prst="rect">
-            <a:avLst/>
-          </a:prstGeom>
-        </p:spPr>
-        <p:txBody>
-          <a:bodyPr/>
-          <a:lstStyle/>
-          <a:p>
-            <a:pPr marL="0" indent="0" algn="ctr" defTabSz="566674">
-              <a:spcBef>
-                <a:spcPts val="4000"/>
-              </a:spcBef>
-              <a:buSzTx/>
-              <a:buNone/>
-              <a:defRPr sz="2910" b="1">
-                <a:solidFill>
-                  <a:schemeClr val="accent1"/>
-                </a:solidFill>
-                <a:latin typeface="Courier"/>
-                <a:ea typeface="Courier"/>
-                <a:cs typeface="Courier"/>
-                <a:sym typeface="Courier"/>
-              </a:defRPr>
-            </a:pPr>
-            <a:r>
-              <a:t>background</a:t>
-            </a:r>
-          </a:p>
-          <a:p>
-            <a:pPr marL="0" indent="0" defTabSz="566674">
-              <a:spcBef>
-                <a:spcPts val="2300"/>
-              </a:spcBef>
-              <a:buSzTx/>
-              <a:buNone/>
-              <a:defRPr sz="2910"/>
-            </a:pPr>
-            <a:r>
-              <a:rPr b="1">
-                <a:latin typeface="+mj-lt"/>
-                <a:ea typeface="+mj-ea"/>
-                <a:cs typeface="+mj-cs"/>
-                <a:sym typeface="Helvetica"/>
-              </a:rPr>
-              <a:t>Values:</a:t>
-            </a:r>
-            <a:r>
-              <a:t> </a:t>
-            </a:r>
-            <a:br/>
-            <a:r>
-              <a:rPr i="1"/>
-              <a:t>background-color  background-image  background-repeat  background-attachment  background-position  background-clip  background-origin  background-size</a:t>
-            </a:r>
-            <a:endParaRPr>
-              <a:latin typeface="+mj-lt"/>
-              <a:ea typeface="+mj-ea"/>
-              <a:cs typeface="+mj-cs"/>
-              <a:sym typeface="Helvetica"/>
-            </a:endParaRPr>
-          </a:p>
-          <a:p>
-            <a:pPr marL="431165" indent="-431165" defTabSz="566674">
-              <a:spcBef>
-                <a:spcPts val="4000"/>
-              </a:spcBef>
-              <a:defRPr sz="2910"/>
-            </a:pPr>
-            <a:r>
-              <a:t>Specifies all background properties in one declaration</a:t>
-            </a:r>
-          </a:p>
-          <a:p>
-            <a:pPr marL="0" lvl="3" indent="665226" defTabSz="566674">
-              <a:spcBef>
-                <a:spcPts val="2900"/>
-              </a:spcBef>
-              <a:buSzTx/>
-              <a:buNone/>
-              <a:defRPr sz="2619">
-                <a:latin typeface="Courier"/>
-                <a:ea typeface="Courier"/>
-                <a:cs typeface="Courier"/>
-                <a:sym typeface="Courier"/>
-              </a:defRPr>
-            </a:pPr>
-            <a:r>
-              <a:rPr b="1">
-                <a:solidFill>
-                  <a:schemeClr val="accent4">
-                    <a:hueOff val="384618"/>
-                    <a:satOff val="3869"/>
-                    <a:lumOff val="5802"/>
-                  </a:schemeClr>
-                </a:solidFill>
-              </a:rPr>
-              <a:t>background:</a:t>
-            </a:r>
-            <a:r>
-              <a:t> white url(star.png) no-repeat top center fixed;</a:t>
-            </a:r>
-          </a:p>
-          <a:p>
-            <a:pPr marL="431165" indent="-431165" defTabSz="566674">
-              <a:spcBef>
-                <a:spcPts val="2900"/>
-              </a:spcBef>
-              <a:defRPr sz="2910"/>
-            </a:pPr>
-            <a:r>
-              <a:t>Properties are optional and may appear in any order</a:t>
-            </a:r>
-          </a:p>
-          <a:p>
-            <a:pPr marL="431165" indent="-431165" defTabSz="566674">
-              <a:spcBef>
-                <a:spcPts val="2900"/>
-              </a:spcBef>
-              <a:defRPr sz="2910"/>
-            </a:pPr>
-            <a:r>
-              <a:t>Properties not represented reset to their defaults—</a:t>
-            </a:r>
-            <a:r>
-              <a:rPr>
-                <a:solidFill>
-                  <a:schemeClr val="accent4"/>
-                </a:solidFill>
-              </a:rPr>
-              <a:t>be careful it doesn’t overwrite previous background settings.</a:t>
-            </a:r>
-          </a:p>
-        </p:txBody>
-      </p:sp>
-    </p:spTree>
-  </p:cSld>
-  <p:clrMapOvr>
-    <a:masterClrMapping/>
-  </p:clrMapOvr>
-  <p:transition spd="med"/>
-</p:sld>
-</file>
-
-<file path=ppt/slides/slide27.xml><?xml version="1.0" encoding="utf-8"?>
-<p:sld xmlns:a="http://schemas.openxmlformats.org/drawingml/2006/main" xmlns:r="http://schemas.openxmlformats.org/officeDocument/2006/relationships" xmlns:p="http://schemas.openxmlformats.org/presentationml/2006/main">
-  <p:cSld>
-    <p:spTree>
-      <p:nvGrpSpPr>
-        <p:cNvPr id="1" name=""/>
-        <p:cNvGrpSpPr/>
-        <p:nvPr/>
-      </p:nvGrpSpPr>
-      <p:grpSpPr>
-        <a:xfrm>
-          <a:off x="0" y="0"/>
-          <a:ext cx="0" cy="0"/>
-          <a:chOff x="0" y="0"/>
-          <a:chExt cx="0" cy="0"/>
-        </a:xfrm>
-      </p:grpSpPr>
-      <p:sp>
-        <p:nvSpPr>
-          <p:cNvPr id="179" name="Multiple Background Images"/>
-          <p:cNvSpPr txBox="1">
-            <a:spLocks noGrp="1"/>
-          </p:cNvSpPr>
-          <p:nvPr>
-            <p:ph type="title"/>
-          </p:nvPr>
-        </p:nvSpPr>
-        <p:spPr>
-          <a:prstGeom prst="rect">
-            <a:avLst/>
-          </a:prstGeom>
-        </p:spPr>
-        <p:txBody>
-          <a:bodyPr/>
-          <a:lstStyle/>
-          <a:p>
-            <a:r>
-              <a:t>Multiple Background Images</a:t>
-            </a:r>
-          </a:p>
-        </p:txBody>
-      </p:sp>
-      <p:sp>
-        <p:nvSpPr>
-          <p:cNvPr id="180" name="You can place more than one background image in a single image (separated by commas):…"/>
-          <p:cNvSpPr txBox="1">
-            <a:spLocks noGrp="1"/>
-          </p:cNvSpPr>
-          <p:nvPr>
-            <p:ph type="body" idx="1"/>
-          </p:nvPr>
-        </p:nvSpPr>
-        <p:spPr>
-          <a:xfrm>
-            <a:off x="952500" y="2603500"/>
-            <a:ext cx="11099800" cy="5677893"/>
-          </a:xfrm>
-          <a:prstGeom prst="rect">
-            <a:avLst/>
-          </a:prstGeom>
-        </p:spPr>
-        <p:txBody>
-          <a:bodyPr anchor="t"/>
-          <a:lstStyle/>
-          <a:p>
-            <a:pPr marL="0" indent="0">
-              <a:buSzTx/>
-              <a:buNone/>
-              <a:defRPr sz="3000"/>
-            </a:pPr>
-            <a:r>
-              <a:t>You can place more than one background image in a single image (separated by commas):</a:t>
-            </a:r>
-          </a:p>
-          <a:p>
-            <a:pPr marL="0" lvl="2" indent="457200">
-              <a:spcBef>
-                <a:spcPts val="6000"/>
-              </a:spcBef>
-              <a:buSzTx/>
-              <a:buNone/>
-              <a:defRPr sz="2700">
-                <a:latin typeface="Courier"/>
-                <a:ea typeface="Courier"/>
-                <a:cs typeface="Courier"/>
-                <a:sym typeface="Courier"/>
-              </a:defRPr>
-            </a:pPr>
-            <a:r>
-              <a:t>body {</a:t>
-            </a:r>
-          </a:p>
-          <a:p>
-            <a:pPr marL="0" lvl="2" indent="457200">
-              <a:spcBef>
-                <a:spcPts val="0"/>
-              </a:spcBef>
-              <a:buSzTx/>
-              <a:buNone/>
-              <a:defRPr sz="2700">
-                <a:latin typeface="Courier"/>
-                <a:ea typeface="Courier"/>
-                <a:cs typeface="Courier"/>
-                <a:sym typeface="Courier"/>
-              </a:defRPr>
-            </a:pPr>
-            <a:r>
-              <a:t>  background:</a:t>
-            </a:r>
-          </a:p>
-          <a:p>
-            <a:pPr marL="0" lvl="2" indent="457200">
-              <a:spcBef>
-                <a:spcPts val="0"/>
-              </a:spcBef>
-              <a:buSzTx/>
-              <a:buNone/>
-              <a:defRPr sz="2700">
-                <a:latin typeface="Courier"/>
-                <a:ea typeface="Courier"/>
-                <a:cs typeface="Courier"/>
-                <a:sym typeface="Courier"/>
-              </a:defRPr>
-            </a:pPr>
-            <a:r>
-              <a:t>    url(image1.png) left top no-repeat,</a:t>
-            </a:r>
-          </a:p>
-          <a:p>
-            <a:pPr marL="0" lvl="2" indent="457200">
-              <a:spcBef>
-                <a:spcPts val="0"/>
-              </a:spcBef>
-              <a:buSzTx/>
-              <a:buNone/>
-              <a:defRPr sz="2700">
-                <a:latin typeface="Courier"/>
-                <a:ea typeface="Courier"/>
-                <a:cs typeface="Courier"/>
-                <a:sym typeface="Courier"/>
-              </a:defRPr>
-            </a:pPr>
-            <a:r>
-              <a:t>    url(image2.png) center center no-repeat,</a:t>
-            </a:r>
-          </a:p>
-          <a:p>
-            <a:pPr marL="0" lvl="2" indent="457200">
-              <a:spcBef>
-                <a:spcPts val="0"/>
-              </a:spcBef>
-              <a:buSzTx/>
-              <a:buNone/>
-              <a:defRPr sz="2700">
-                <a:latin typeface="Courier"/>
-                <a:ea typeface="Courier"/>
-                <a:cs typeface="Courier"/>
-                <a:sym typeface="Courier"/>
-              </a:defRPr>
-            </a:pPr>
-            <a:r>
-              <a:t>    url(image3.png) right bottom no-repeat;</a:t>
-            </a:r>
-          </a:p>
-          <a:p>
-            <a:pPr marL="0" lvl="2" indent="457200">
-              <a:spcBef>
-                <a:spcPts val="0"/>
-              </a:spcBef>
-              <a:buSzTx/>
-              <a:buNone/>
-              <a:defRPr sz="2700">
-                <a:latin typeface="Courier"/>
-                <a:ea typeface="Courier"/>
-                <a:cs typeface="Courier"/>
-                <a:sym typeface="Courier"/>
-              </a:defRPr>
-            </a:pPr>
-            <a:r>
-              <a:t>  }</a:t>
-            </a:r>
-          </a:p>
-        </p:txBody>
-      </p:sp>
-    </p:spTree>
-  </p:cSld>
-  <p:clrMapOvr>
-    <a:masterClrMapping/>
-  </p:clrMapOvr>
-  <p:transition spd="med"/>
-</p:sld>
-</file>
-
-<file path=ppt/slides/slide28.xml><?xml version="1.0" encoding="utf-8"?>
-<p:sld xmlns:a="http://schemas.openxmlformats.org/drawingml/2006/main" xmlns:r="http://schemas.openxmlformats.org/officeDocument/2006/relationships" xmlns:p="http://schemas.openxmlformats.org/presentationml/2006/main">
-  <p:cSld>
-    <p:spTree>
-      <p:nvGrpSpPr>
-        <p:cNvPr id="1" name=""/>
-        <p:cNvGrpSpPr/>
-        <p:nvPr/>
-      </p:nvGrpSpPr>
-      <p:grpSpPr>
-        <a:xfrm>
-          <a:off x="0" y="0"/>
-          <a:ext cx="0" cy="0"/>
-          <a:chOff x="0" y="0"/>
-          <a:chExt cx="0" cy="0"/>
-        </a:xfrm>
-      </p:grpSpPr>
-      <p:sp>
-        <p:nvSpPr>
-          <p:cNvPr id="182" name="Gradient Fills"/>
-          <p:cNvSpPr txBox="1">
-            <a:spLocks noGrp="1"/>
-          </p:cNvSpPr>
-          <p:nvPr>
-            <p:ph type="title"/>
-          </p:nvPr>
-        </p:nvSpPr>
-        <p:spPr>
-          <a:prstGeom prst="rect">
-            <a:avLst/>
-          </a:prstGeom>
-        </p:spPr>
-        <p:txBody>
-          <a:bodyPr/>
-          <a:lstStyle/>
-          <a:p>
-            <a:r>
-              <a:t>Gradient Fills</a:t>
-            </a:r>
-          </a:p>
-        </p:txBody>
-      </p:sp>
-      <p:sp>
-        <p:nvSpPr>
-          <p:cNvPr id="183" name="A gradient is a transition from one color to another.…"/>
-          <p:cNvSpPr txBox="1">
-            <a:spLocks noGrp="1"/>
-          </p:cNvSpPr>
-          <p:nvPr>
-            <p:ph type="body" idx="1"/>
-          </p:nvPr>
-        </p:nvSpPr>
-        <p:spPr>
-          <a:xfrm>
-            <a:off x="999579" y="2476500"/>
-            <a:ext cx="11099801" cy="6706146"/>
-          </a:xfrm>
-          <a:prstGeom prst="rect">
-            <a:avLst/>
-          </a:prstGeom>
-        </p:spPr>
-        <p:txBody>
-          <a:bodyPr/>
-          <a:lstStyle/>
-          <a:p>
-            <a:pPr marL="422275" indent="-422275" defTabSz="554990">
-              <a:spcBef>
-                <a:spcPts val="3900"/>
-              </a:spcBef>
-              <a:defRPr sz="2850"/>
-            </a:pPr>
-            <a:r>
-              <a:t>A </a:t>
-            </a:r>
-            <a:r>
-              <a:rPr b="1">
-                <a:latin typeface="+mj-lt"/>
-                <a:ea typeface="+mj-ea"/>
-                <a:cs typeface="+mj-cs"/>
-                <a:sym typeface="Helvetica"/>
-              </a:rPr>
-              <a:t>gradient</a:t>
-            </a:r>
-            <a:r>
-              <a:t> is a transition from one color to another.</a:t>
-            </a:r>
-          </a:p>
-          <a:p>
-            <a:pPr marL="422275" indent="-422275" defTabSz="554990">
-              <a:spcBef>
-                <a:spcPts val="2800"/>
-              </a:spcBef>
-              <a:defRPr sz="2850"/>
-            </a:pPr>
-            <a:r>
-              <a:rPr b="1">
-                <a:latin typeface="+mj-lt"/>
-                <a:ea typeface="+mj-ea"/>
-                <a:cs typeface="+mj-cs"/>
-                <a:sym typeface="Helvetica"/>
-              </a:rPr>
-              <a:t>Linear gradients</a:t>
-            </a:r>
-            <a:r>
-              <a:t> change colors along a line.</a:t>
-            </a:r>
-          </a:p>
-          <a:p>
-            <a:pPr marL="422275" indent="-422275" defTabSz="554990">
-              <a:spcBef>
-                <a:spcPts val="2800"/>
-              </a:spcBef>
-              <a:defRPr sz="2850"/>
-            </a:pPr>
-            <a:r>
-              <a:rPr b="1">
-                <a:latin typeface="+mj-lt"/>
-                <a:ea typeface="+mj-ea"/>
-                <a:cs typeface="+mj-cs"/>
-                <a:sym typeface="Helvetica"/>
-              </a:rPr>
-              <a:t>Radial gradients</a:t>
-            </a:r>
-            <a:r>
-              <a:t> start at a point and spread outward in a circular or elliptical shape.</a:t>
-            </a:r>
-          </a:p>
-          <a:p>
-            <a:pPr marL="422275" indent="-422275" defTabSz="554990">
-              <a:spcBef>
-                <a:spcPts val="2800"/>
-              </a:spcBef>
-              <a:defRPr sz="2850"/>
-            </a:pPr>
-            <a:r>
-              <a:t>You can generate a gradient image for use as a background using </a:t>
-            </a:r>
-            <a:r>
-              <a:rPr b="1">
-                <a:latin typeface="Courier"/>
-                <a:ea typeface="Courier"/>
-                <a:cs typeface="Courier"/>
-                <a:sym typeface="Courier"/>
-              </a:rPr>
-              <a:t>linear-gradient()</a:t>
-            </a:r>
-            <a:r>
-              <a:t> and </a:t>
-            </a:r>
-            <a:r>
-              <a:rPr b="1">
-                <a:latin typeface="Courier"/>
-                <a:ea typeface="Courier"/>
-                <a:cs typeface="Courier"/>
-                <a:sym typeface="Courier"/>
-              </a:rPr>
-              <a:t>radial-gradient()</a:t>
-            </a:r>
-            <a:r>
-              <a:t> notation.</a:t>
-            </a:r>
-          </a:p>
-          <a:p>
-            <a:pPr marL="0" indent="0" defTabSz="554990">
-              <a:spcBef>
-                <a:spcPts val="3900"/>
-              </a:spcBef>
-              <a:buSzTx/>
-              <a:buNone/>
-              <a:defRPr sz="2850" b="1">
-                <a:latin typeface="+mj-lt"/>
-                <a:ea typeface="+mj-ea"/>
-                <a:cs typeface="+mj-cs"/>
-                <a:sym typeface="Helvetica"/>
-              </a:defRPr>
-            </a:pPr>
-            <a:r>
-              <a:t>Example:</a:t>
-            </a:r>
-          </a:p>
-          <a:p>
-            <a:pPr marL="0" lvl="1" indent="217170" defTabSz="554990">
-              <a:spcBef>
-                <a:spcPts val="1100"/>
-              </a:spcBef>
-              <a:buSzTx/>
-              <a:buNone/>
-              <a:defRPr sz="2470">
-                <a:latin typeface="Courier"/>
-                <a:ea typeface="Courier"/>
-                <a:cs typeface="Courier"/>
-                <a:sym typeface="Courier"/>
-              </a:defRPr>
-            </a:pPr>
-            <a:r>
-              <a:t>#banner {</a:t>
-            </a:r>
-          </a:p>
-          <a:p>
-            <a:pPr marL="0" lvl="1" indent="217170" defTabSz="554990">
-              <a:spcBef>
-                <a:spcPts val="0"/>
-              </a:spcBef>
-              <a:buSzTx/>
-              <a:buNone/>
-              <a:defRPr sz="2470">
-                <a:latin typeface="Courier"/>
-                <a:ea typeface="Courier"/>
-                <a:cs typeface="Courier"/>
-                <a:sym typeface="Courier"/>
-              </a:defRPr>
-            </a:pPr>
-            <a:r>
-              <a:t>  background-image: </a:t>
-            </a:r>
-            <a:r>
-              <a:rPr b="1">
-                <a:solidFill>
-                  <a:schemeClr val="accent4">
-                    <a:hueOff val="384618"/>
-                    <a:satOff val="3869"/>
-                    <a:lumOff val="5802"/>
-                  </a:schemeClr>
-                </a:solidFill>
-              </a:rPr>
-              <a:t>linear-gradient(180deg, aqua, green)</a:t>
-            </a:r>
-            <a:r>
-              <a:t>; </a:t>
-            </a:r>
-          </a:p>
-          <a:p>
-            <a:pPr marL="0" lvl="1" indent="217170" defTabSz="554990">
-              <a:spcBef>
-                <a:spcPts val="0"/>
-              </a:spcBef>
-              <a:buSzTx/>
-              <a:buNone/>
-              <a:defRPr sz="2470">
-                <a:latin typeface="Courier"/>
-                <a:ea typeface="Courier"/>
-                <a:cs typeface="Courier"/>
-                <a:sym typeface="Courier"/>
-              </a:defRPr>
-            </a:pPr>
-            <a:r>
-              <a:t>}</a:t>
-            </a:r>
-          </a:p>
-        </p:txBody>
-      </p:sp>
-    </p:spTree>
-  </p:cSld>
-  <p:clrMapOvr>
-    <a:masterClrMapping/>
-  </p:clrMapOvr>
-  <p:transition spd="med"/>
-</p:sld>
-</file>
-
-<file path=ppt/slides/slide29.xml><?xml version="1.0" encoding="utf-8"?>
-<p:sld xmlns:a="http://schemas.openxmlformats.org/drawingml/2006/main" xmlns:r="http://schemas.openxmlformats.org/officeDocument/2006/relationships" xmlns:p="http://schemas.openxmlformats.org/presentationml/2006/main">
-  <p:cSld>
-    <p:spTree>
-      <p:nvGrpSpPr>
-        <p:cNvPr id="1" name=""/>
-        <p:cNvGrpSpPr/>
-        <p:nvPr/>
-      </p:nvGrpSpPr>
-      <p:grpSpPr>
-        <a:xfrm>
-          <a:off x="0" y="0"/>
-          <a:ext cx="0" cy="0"/>
-          <a:chOff x="0" y="0"/>
-          <a:chExt cx="0" cy="0"/>
-        </a:xfrm>
-      </p:grpSpPr>
-      <p:sp>
-        <p:nvSpPr>
-          <p:cNvPr id="185" name="Linear Gradient"/>
-          <p:cNvSpPr txBox="1">
-            <a:spLocks noGrp="1"/>
-          </p:cNvSpPr>
-          <p:nvPr>
-            <p:ph type="title"/>
-          </p:nvPr>
-        </p:nvSpPr>
-        <p:spPr>
-          <a:prstGeom prst="rect">
-            <a:avLst/>
-          </a:prstGeom>
-        </p:spPr>
-        <p:txBody>
-          <a:bodyPr/>
-          <a:lstStyle/>
-          <a:p>
-            <a:r>
-              <a:t>Linear Gradient</a:t>
-            </a:r>
-          </a:p>
-        </p:txBody>
-      </p:sp>
-      <p:sp>
-        <p:nvSpPr>
-          <p:cNvPr id="186" name="The linear-gradient() notation provides the angle of a gradient line and the colors the line passes through.…"/>
-          <p:cNvSpPr txBox="1">
-            <a:spLocks noGrp="1"/>
-          </p:cNvSpPr>
-          <p:nvPr>
-            <p:ph type="body" sz="half" idx="1"/>
-          </p:nvPr>
-        </p:nvSpPr>
-        <p:spPr>
-          <a:xfrm>
-            <a:off x="850900" y="3145432"/>
-            <a:ext cx="5903814" cy="5215336"/>
-          </a:xfrm>
-          <a:prstGeom prst="rect">
-            <a:avLst/>
-          </a:prstGeom>
-        </p:spPr>
-        <p:txBody>
-          <a:bodyPr anchor="t"/>
-          <a:lstStyle/>
-          <a:p>
-            <a:pPr marL="0" indent="0">
-              <a:buSzTx/>
-              <a:buNone/>
-              <a:defRPr sz="3000"/>
-            </a:pPr>
-            <a:r>
-              <a:t>The </a:t>
-            </a:r>
-            <a:r>
-              <a:rPr b="1">
-                <a:latin typeface="Courier"/>
-                <a:ea typeface="Courier"/>
-                <a:cs typeface="Courier"/>
-                <a:sym typeface="Courier"/>
-              </a:rPr>
-              <a:t>linear-gradient()</a:t>
-            </a:r>
-            <a:r>
-              <a:t> notation provides the angle of a gradient line and the colors the line passes through.</a:t>
-            </a:r>
-          </a:p>
-          <a:p>
-            <a:pPr marL="0" indent="0">
-              <a:buSzTx/>
-              <a:buNone/>
-              <a:defRPr sz="3000"/>
-            </a:pPr>
-            <a:r>
-              <a:t>It is specified in degrees (</a:t>
-            </a:r>
-            <a:r>
-              <a:rPr>
-                <a:latin typeface="Courier"/>
-                <a:ea typeface="Courier"/>
-                <a:cs typeface="Courier"/>
-                <a:sym typeface="Courier"/>
-              </a:rPr>
-              <a:t>deg</a:t>
-            </a:r>
-            <a:r>
-              <a:t>) or keywords (</a:t>
-            </a:r>
-            <a:r>
-              <a:rPr>
-                <a:latin typeface="Courier"/>
-                <a:ea typeface="Courier"/>
-                <a:cs typeface="Courier"/>
-                <a:sym typeface="Courier"/>
-              </a:rPr>
-              <a:t>to top</a:t>
-            </a:r>
-            <a:r>
-              <a:t>, </a:t>
-            </a:r>
-            <a:r>
-              <a:rPr>
-                <a:latin typeface="Courier"/>
-                <a:ea typeface="Courier"/>
-                <a:cs typeface="Courier"/>
-                <a:sym typeface="Courier"/>
-              </a:rPr>
-              <a:t>to right</a:t>
-            </a:r>
-            <a:r>
-              <a:t>, </a:t>
-            </a:r>
-            <a:r>
-              <a:rPr>
-                <a:latin typeface="Courier"/>
-                <a:ea typeface="Courier"/>
-                <a:cs typeface="Courier"/>
-                <a:sym typeface="Courier"/>
-              </a:rPr>
-              <a:t>to bottom</a:t>
-            </a:r>
-            <a:r>
-              <a:t>, </a:t>
-            </a:r>
-            <a:r>
-              <a:rPr>
-                <a:latin typeface="Courier"/>
-                <a:ea typeface="Courier"/>
-                <a:cs typeface="Courier"/>
-                <a:sym typeface="Courier"/>
-              </a:rPr>
-              <a:t>to left</a:t>
-            </a:r>
-            <a:r>
-              <a:t>).</a:t>
-            </a:r>
-          </a:p>
-        </p:txBody>
-      </p:sp>
-      <p:pic>
-        <p:nvPicPr>
-          <p:cNvPr id="187" name="lwd5_1331_linear.png" descr="lwd5_1331_linear.png"/>
-          <p:cNvPicPr>
-            <a:picLocks noChangeAspect="1"/>
-          </p:cNvPicPr>
-          <p:nvPr/>
-        </p:nvPicPr>
-        <p:blipFill>
-          <a:blip r:embed="rId2"/>
-          <a:stretch>
-            <a:fillRect/>
-          </a:stretch>
-        </p:blipFill>
-        <p:spPr>
-          <a:xfrm>
-            <a:off x="7068335" y="2286956"/>
-            <a:ext cx="5447515" cy="6932288"/>
+            <a:off x="6582664" y="2559311"/>
+            <a:ext cx="5164837" cy="6489439"/>
           </a:xfrm>
           <a:prstGeom prst="rect">
             <a:avLst/>
@@ -7197,133 +6267,6 @@
 </p:sld>
 </file>
 
-<file path=ppt/slides/slide30.xml><?xml version="1.0" encoding="utf-8"?>
-<p:sld xmlns:a="http://schemas.openxmlformats.org/drawingml/2006/main" xmlns:r="http://schemas.openxmlformats.org/officeDocument/2006/relationships" xmlns:p="http://schemas.openxmlformats.org/presentationml/2006/main">
-  <p:cSld>
-    <p:spTree>
-      <p:nvGrpSpPr>
-        <p:cNvPr id="1" name=""/>
-        <p:cNvGrpSpPr/>
-        <p:nvPr/>
-      </p:nvGrpSpPr>
-      <p:grpSpPr>
-        <a:xfrm>
-          <a:off x="0" y="0"/>
-          <a:ext cx="0" cy="0"/>
-          <a:chOff x="0" y="0"/>
-          <a:chExt cx="0" cy="0"/>
-        </a:xfrm>
-      </p:grpSpPr>
-      <p:sp>
-        <p:nvSpPr>
-          <p:cNvPr id="189" name="Radial Gradients"/>
-          <p:cNvSpPr txBox="1">
-            <a:spLocks noGrp="1"/>
-          </p:cNvSpPr>
-          <p:nvPr>
-            <p:ph type="title"/>
-          </p:nvPr>
-        </p:nvSpPr>
-        <p:spPr>
-          <a:prstGeom prst="rect">
-            <a:avLst/>
-          </a:prstGeom>
-        </p:spPr>
-        <p:txBody>
-          <a:bodyPr/>
-          <a:lstStyle/>
-          <a:p>
-            <a:r>
-              <a:t>Radial Gradients</a:t>
-            </a:r>
-          </a:p>
-        </p:txBody>
-      </p:sp>
-      <p:sp>
-        <p:nvSpPr>
-          <p:cNvPr id="190" name="The radial-gradient() notation provides the color values and optional size, shape, and position information."/>
-          <p:cNvSpPr txBox="1">
-            <a:spLocks noGrp="1"/>
-          </p:cNvSpPr>
-          <p:nvPr>
-            <p:ph type="body" sz="quarter" idx="4294967295"/>
-          </p:nvPr>
-        </p:nvSpPr>
-        <p:spPr>
-          <a:xfrm>
-            <a:off x="698500" y="2540000"/>
-            <a:ext cx="5412135" cy="2281337"/>
-          </a:xfrm>
-          <a:prstGeom prst="rect">
-            <a:avLst/>
-          </a:prstGeom>
-        </p:spPr>
-        <p:txBody>
-          <a:bodyPr/>
-          <a:lstStyle/>
-          <a:p>
-            <a:pPr marL="0" indent="0" defTabSz="566674">
-              <a:spcBef>
-                <a:spcPts val="4000"/>
-              </a:spcBef>
-              <a:buSzTx/>
-              <a:buNone/>
-              <a:defRPr sz="2910"/>
-            </a:pPr>
-            <a:r>
-              <a:t>The </a:t>
-            </a:r>
-            <a:r>
-              <a:rPr b="1">
-                <a:latin typeface="Courier"/>
-                <a:ea typeface="Courier"/>
-                <a:cs typeface="Courier"/>
-                <a:sym typeface="Courier"/>
-              </a:rPr>
-              <a:t>radial-gradient()</a:t>
-            </a:r>
-            <a:r>
-              <a:t> notation provides the color values and optional size, shape, and position information.</a:t>
-            </a:r>
-          </a:p>
-        </p:txBody>
-      </p:sp>
-      <p:pic>
-        <p:nvPicPr>
-          <p:cNvPr id="191" name="lwd5_1334_radialexamples.png" descr="lwd5_1334_radialexamples.png"/>
-          <p:cNvPicPr>
-            <a:picLocks noChangeAspect="1"/>
-          </p:cNvPicPr>
-          <p:nvPr/>
-        </p:nvPicPr>
-        <p:blipFill>
-          <a:blip r:embed="rId2"/>
-          <a:stretch>
-            <a:fillRect/>
-          </a:stretch>
-        </p:blipFill>
-        <p:spPr>
-          <a:xfrm>
-            <a:off x="6582664" y="2559311"/>
-            <a:ext cx="5164837" cy="6489439"/>
-          </a:xfrm>
-          <a:prstGeom prst="rect">
-            <a:avLst/>
-          </a:prstGeom>
-          <a:ln w="12700">
-            <a:miter lim="400000"/>
-          </a:ln>
-        </p:spPr>
-      </p:pic>
-    </p:spTree>
-  </p:cSld>
-  <p:clrMapOvr>
-    <a:masterClrMapping/>
-  </p:clrMapOvr>
-  <p:transition spd="med"/>
-</p:sld>
-</file>
-
 <file path=ppt/slides/slide4.xml><?xml version="1.0" encoding="utf-8"?>
 <p:sld xmlns:a="http://schemas.openxmlformats.org/drawingml/2006/main" xmlns:r="http://schemas.openxmlformats.org/officeDocument/2006/relationships" xmlns:p="http://schemas.openxmlformats.org/presentationml/2006/main">
   <p:cSld>
@@ -7395,10 +6338,11 @@
               <a:defRPr sz="3000"/>
             </a:pPr>
             <a:r>
+              <a:rPr dirty="0"/>
               <a:t>Specify foreground or background color using one of 140 predefined CSS3 </a:t>
             </a:r>
             <a:r>
-              <a:rPr b="1">
+              <a:rPr b="1" dirty="0">
                 <a:latin typeface="+mj-lt"/>
                 <a:ea typeface="+mj-ea"/>
                 <a:cs typeface="+mj-cs"/>
@@ -7407,6 +6351,7 @@
               <a:t>color names</a:t>
             </a:r>
             <a:r>
+              <a:rPr dirty="0"/>
               <a:t>:</a:t>
             </a:r>
           </a:p>
@@ -7422,10 +6367,11 @@
               </a:defRPr>
             </a:pPr>
             <a:r>
+              <a:rPr dirty="0"/>
               <a:t>h1 { color: </a:t>
             </a:r>
             <a:r>
-              <a:rPr b="1">
+              <a:rPr b="1" dirty="0">
                 <a:solidFill>
                   <a:schemeClr val="accent4">
                     <a:hueOff val="384618"/>
@@ -7437,6 +6383,7 @@
               <a:t>red</a:t>
             </a:r>
             <a:r>
+              <a:rPr dirty="0"/>
               <a:t>; }</a:t>
             </a:r>
           </a:p>
@@ -7452,10 +6399,11 @@
               </a:defRPr>
             </a:pPr>
             <a:r>
+              <a:rPr dirty="0"/>
               <a:t>h2 { color: </a:t>
             </a:r>
             <a:r>
-              <a:rPr b="1">
+              <a:rPr b="1" dirty="0" err="1">
                 <a:solidFill>
                   <a:schemeClr val="accent4">
                     <a:hueOff val="384618"/>
@@ -7467,6 +6415,7 @@
               <a:t>darkviolet</a:t>
             </a:r>
             <a:r>
+              <a:rPr dirty="0"/>
               <a:t>; }</a:t>
             </a:r>
           </a:p>
@@ -7482,10 +6431,11 @@
               </a:defRPr>
             </a:pPr>
             <a:r>
+              <a:rPr dirty="0"/>
               <a:t>body { background-color: </a:t>
             </a:r>
             <a:r>
-              <a:rPr b="1">
+              <a:rPr b="1" dirty="0" err="1">
                 <a:solidFill>
                   <a:schemeClr val="accent4">
                     <a:hueOff val="384618"/>
@@ -7497,31 +6447,8 @@
               <a:t>papayawhip</a:t>
             </a:r>
             <a:r>
+              <a:rPr dirty="0"/>
               <a:t>; }</a:t>
-            </a:r>
-          </a:p>
-          <a:p>
-            <a:pPr marL="0" indent="0" algn="ctr">
-              <a:spcBef>
-                <a:spcPts val="6000"/>
-              </a:spcBef>
-              <a:buSzTx/>
-              <a:buNone/>
-              <a:defRPr sz="3000">
-                <a:solidFill>
-                  <a:schemeClr val="accent1"/>
-                </a:solidFill>
-                <a:latin typeface="+mj-lt"/>
-                <a:ea typeface="+mj-ea"/>
-                <a:cs typeface="+mj-cs"/>
-                <a:sym typeface="Helvetica"/>
-              </a:defRPr>
-            </a:pPr>
-            <a:r>
-              <a:rPr u="sng">
-                <a:hlinkClick r:id="rId2"/>
-              </a:rPr>
-              <a:t>learningwebdesign.com/colornames.html</a:t>
             </a:r>
           </a:p>
         </p:txBody>
@@ -7606,6 +6533,7 @@
               <a:defRPr sz="3000"/>
             </a:pPr>
             <a:r>
+              <a:rPr dirty="0"/>
               <a:t>For more control, define colors numerically. Color models include:</a:t>
             </a:r>
           </a:p>
@@ -7614,7 +6542,7 @@
               <a:defRPr sz="3000"/>
             </a:pPr>
             <a:r>
-              <a:rPr b="1">
+              <a:rPr b="1" dirty="0">
                 <a:latin typeface="+mj-lt"/>
                 <a:ea typeface="+mj-ea"/>
                 <a:cs typeface="+mj-cs"/>
@@ -7623,6 +6551,7 @@
               <a:t>RGB</a:t>
             </a:r>
             <a:r>
+              <a:rPr dirty="0"/>
               <a:t> (combination of red, green, and blue light values)</a:t>
             </a:r>
           </a:p>
@@ -7631,7 +6560,7 @@
               <a:defRPr sz="3000"/>
             </a:pPr>
             <a:r>
-              <a:rPr b="1">
+              <a:rPr b="1" dirty="0">
                 <a:latin typeface="+mj-lt"/>
                 <a:ea typeface="+mj-ea"/>
                 <a:cs typeface="+mj-cs"/>
@@ -7640,6 +6569,7 @@
               <a:t>HSL</a:t>
             </a:r>
             <a:r>
+              <a:rPr dirty="0"/>
               <a:t> (hue, saturation, and luminosity)</a:t>
             </a:r>
           </a:p>
@@ -7653,41 +6583,20 @@
               </a:defRPr>
             </a:pPr>
             <a:r>
-              <a:t>OKLCH </a:t>
-            </a:r>
-            <a:r>
-              <a:rPr b="0">
+              <a:rPr b="0" dirty="0">
                 <a:latin typeface="+mn-lt"/>
                 <a:ea typeface="+mn-ea"/>
                 <a:cs typeface="+mn-cs"/>
                 <a:sym typeface="Helvetica Light"/>
               </a:rPr>
-              <a:t>(lightness, chroma, hue)</a:t>
-            </a:r>
-          </a:p>
-          <a:p>
-            <a:pPr lvl="1">
-              <a:defRPr sz="3000" b="1">
-                <a:latin typeface="+mj-lt"/>
-                <a:ea typeface="+mj-ea"/>
-                <a:cs typeface="+mj-cs"/>
-                <a:sym typeface="Helvetica"/>
-              </a:defRPr>
-            </a:pPr>
-            <a:r>
-              <a:rPr b="0">
-                <a:latin typeface="+mn-lt"/>
-                <a:ea typeface="+mn-ea"/>
-                <a:cs typeface="+mn-cs"/>
-                <a:sym typeface="Helvetica Light"/>
-              </a:rPr>
               <a:t>Each model may include an </a:t>
             </a:r>
             <a:r>
+              <a:rPr dirty="0"/>
               <a:t>alpha transparency</a:t>
             </a:r>
             <a:r>
-              <a:rPr b="0">
+              <a:rPr b="0" dirty="0">
                 <a:latin typeface="+mn-lt"/>
                 <a:ea typeface="+mn-ea"/>
                 <a:cs typeface="+mn-cs"/>
@@ -7912,6 +6821,7 @@
               <a:defRPr sz="3000"/>
             </a:pPr>
             <a:r>
+              <a:rPr dirty="0"/>
               <a:t>There are four formats for providing RGB color values:</a:t>
             </a:r>
           </a:p>
@@ -7920,10 +6830,11 @@
               <a:defRPr sz="3000"/>
             </a:pPr>
             <a:r>
+              <a:rPr dirty="0"/>
               <a:t>RGB values (0 to 255):  </a:t>
             </a:r>
             <a:r>
-              <a:rPr b="1">
+              <a:rPr b="1" dirty="0" err="1">
                 <a:solidFill>
                   <a:schemeClr val="accent4">
                     <a:hueOff val="384618"/>
@@ -7936,20 +6847,10 @@
                 <a:cs typeface="Courier"/>
                 <a:sym typeface="Courier"/>
               </a:rPr>
-              <a:t>rgb(200 178 230)</a:t>
-            </a:r>
-          </a:p>
-          <a:p>
-            <a:pPr marL="0" lvl="1" indent="228600">
-              <a:spcBef>
-                <a:spcPts val="200"/>
-              </a:spcBef>
-              <a:buSzTx/>
-              <a:buNone/>
-              <a:defRPr sz="3000"/>
-            </a:pPr>
-            <a:r>
-              <a:rPr b="1">
+              <a:t>rgb</a:t>
+            </a:r>
+            <a:r>
+              <a:rPr b="1" dirty="0">
                 <a:solidFill>
                   <a:schemeClr val="accent4">
                     <a:hueOff val="384618"/>
@@ -7962,35 +6863,20 @@
                 <a:cs typeface="Courier"/>
                 <a:sym typeface="Courier"/>
               </a:rPr>
-              <a:t>   </a:t>
-            </a:r>
-            <a:r>
-              <a:rPr sz="2000" b="1">
-                <a:solidFill>
-                  <a:srgbClr val="A6AAA9"/>
-                </a:solidFill>
-                <a:latin typeface="+mj-lt"/>
-                <a:ea typeface="+mj-ea"/>
-                <a:cs typeface="+mj-cs"/>
-                <a:sym typeface="Helvetica"/>
-              </a:rPr>
-              <a:t>NOTE: Old browsers require commas between values</a:t>
-            </a:r>
-            <a:endParaRPr>
-              <a:solidFill>
-                <a:srgbClr val="A6AAA9"/>
-              </a:solidFill>
-            </a:endParaRPr>
-          </a:p>
-          <a:p>
-            <a:pPr lvl="1">
+              <a:t>(200 178 230)</a:t>
+            </a:r>
+          </a:p>
+          <a:p>
+            <a:pPr marL="0" lvl="1" indent="228600">
+              <a:spcBef>
+                <a:spcPts val="200"/>
+              </a:spcBef>
+              <a:buSzTx/>
+              <a:buNone/>
               <a:defRPr sz="3000"/>
             </a:pPr>
             <a:r>
-              <a:t>Percentage values:  </a:t>
-            </a:r>
-            <a:r>
-              <a:rPr b="1">
+              <a:rPr b="1" dirty="0">
                 <a:solidFill>
                   <a:schemeClr val="accent4">
                     <a:hueOff val="384618"/>
@@ -8003,20 +6889,36 @@
                 <a:cs typeface="Courier"/>
                 <a:sym typeface="Courier"/>
               </a:rPr>
-              <a:t>rgb(78% 70% 90%)</a:t>
-            </a:r>
-          </a:p>
-          <a:p>
-            <a:pPr marL="0" lvl="1" indent="228600">
-              <a:spcBef>
-                <a:spcPts val="200"/>
-              </a:spcBef>
-              <a:buSzTx/>
-              <a:buNone/>
+              <a:t>   </a:t>
+            </a:r>
+            <a:r>
+              <a:rPr sz="2000" b="1" dirty="0">
+                <a:solidFill>
+                  <a:srgbClr val="A6AAA9"/>
+                </a:solidFill>
+                <a:latin typeface="+mj-lt"/>
+                <a:ea typeface="+mj-ea"/>
+                <a:cs typeface="+mj-cs"/>
+                <a:sym typeface="Helvetica"/>
+              </a:rPr>
+              <a:t>NOTE: Old browsers require commas between values</a:t>
+            </a:r>
+            <a:endParaRPr dirty="0">
+              <a:solidFill>
+                <a:srgbClr val="A6AAA9"/>
+              </a:solidFill>
+            </a:endParaRPr>
+          </a:p>
+          <a:p>
+            <a:pPr lvl="1">
               <a:defRPr sz="3000"/>
             </a:pPr>
             <a:r>
-              <a:rPr b="1">
+              <a:rPr dirty="0"/>
+              <a:t>Percentage values:  </a:t>
+            </a:r>
+            <a:r>
+              <a:rPr b="1" dirty="0" err="1">
                 <a:solidFill>
                   <a:schemeClr val="accent4">
                     <a:hueOff val="384618"/>
@@ -8029,30 +6931,10 @@
                 <a:cs typeface="Courier"/>
                 <a:sym typeface="Courier"/>
               </a:rPr>
-              <a:t>   </a:t>
-            </a:r>
-            <a:r>
-              <a:rPr sz="2000" b="1">
-                <a:solidFill>
-                  <a:srgbClr val="A6AAA9"/>
-                </a:solidFill>
-                <a:latin typeface="+mj-lt"/>
-                <a:ea typeface="+mj-ea"/>
-                <a:cs typeface="+mj-cs"/>
-                <a:sym typeface="Helvetica"/>
-              </a:rPr>
-              <a:t>NOTE: Old browsers require commas between values</a:t>
-            </a:r>
-          </a:p>
-          <a:p>
-            <a:pPr lvl="1">
-              <a:defRPr sz="3000"/>
-            </a:pPr>
-            <a:r>
-              <a:t>Hexadecimal values:  </a:t>
-            </a:r>
-            <a:r>
-              <a:rPr b="1">
+              <a:t>rgb</a:t>
+            </a:r>
+            <a:r>
+              <a:rPr b="1" dirty="0">
                 <a:solidFill>
                   <a:schemeClr val="accent4">
                     <a:hueOff val="384618"/>
@@ -8065,24 +6947,20 @@
                 <a:cs typeface="Courier"/>
                 <a:sym typeface="Courier"/>
               </a:rPr>
-              <a:t>#C8B2E6</a:t>
-            </a:r>
-            <a:endParaRPr>
-              <a:latin typeface="Courier"/>
-              <a:ea typeface="Courier"/>
-              <a:cs typeface="Courier"/>
-              <a:sym typeface="Courier"/>
-            </a:endParaRPr>
-          </a:p>
-          <a:p>
-            <a:pPr lvl="1">
+              <a:t>(78% 70% 90%)</a:t>
+            </a:r>
+          </a:p>
+          <a:p>
+            <a:pPr marL="0" lvl="1" indent="228600">
+              <a:spcBef>
+                <a:spcPts val="200"/>
+              </a:spcBef>
+              <a:buSzTx/>
+              <a:buNone/>
               <a:defRPr sz="3000"/>
             </a:pPr>
             <a:r>
-              <a:t>Condensed hexadecimal values (for double-digits only): </a:t>
-            </a:r>
-            <a:r>
-              <a:rPr b="1">
+              <a:rPr b="1" dirty="0">
                 <a:solidFill>
                   <a:schemeClr val="accent4">
                     <a:hueOff val="384618"/>
@@ -8095,13 +6973,31 @@
                 <a:cs typeface="Courier"/>
                 <a:sym typeface="Courier"/>
               </a:rPr>
-              <a:t>#F06</a:t>
-            </a:r>
-            <a:r>
-              <a:t> is the same as  </a:t>
-            </a:r>
-            <a:r>
-              <a:rPr b="1">
+              <a:t>   </a:t>
+            </a:r>
+            <a:r>
+              <a:rPr sz="2000" b="1" dirty="0">
+                <a:solidFill>
+                  <a:srgbClr val="A6AAA9"/>
+                </a:solidFill>
+                <a:latin typeface="+mj-lt"/>
+                <a:ea typeface="+mj-ea"/>
+                <a:cs typeface="+mj-cs"/>
+                <a:sym typeface="Helvetica"/>
+              </a:rPr>
+              <a:t>NOTE: Old browsers require commas between values</a:t>
+            </a:r>
+          </a:p>
+          <a:p>
+            <a:pPr lvl="1">
+              <a:defRPr sz="3000"/>
+            </a:pPr>
+            <a:r>
+              <a:rPr dirty="0"/>
+              <a:t>Hexadecimal values:  </a:t>
+            </a:r>
+            <a:r>
+              <a:rPr b="1" dirty="0">
                 <a:solidFill>
                   <a:schemeClr val="accent4">
                     <a:hueOff val="384618"/>
@@ -8114,9 +7010,61 @@
                 <a:cs typeface="Courier"/>
                 <a:sym typeface="Courier"/>
               </a:rPr>
+              <a:t>#C8B2E6</a:t>
+            </a:r>
+            <a:endParaRPr dirty="0">
+              <a:latin typeface="Courier"/>
+              <a:ea typeface="Courier"/>
+              <a:cs typeface="Courier"/>
+              <a:sym typeface="Courier"/>
+            </a:endParaRPr>
+          </a:p>
+          <a:p>
+            <a:pPr lvl="1">
+              <a:defRPr sz="3000"/>
+            </a:pPr>
+            <a:r>
+              <a:rPr dirty="0"/>
+              <a:t>Condensed hexadecimal values (for double-digits only): </a:t>
+            </a:r>
+            <a:r>
+              <a:rPr b="1" dirty="0">
+                <a:solidFill>
+                  <a:schemeClr val="accent4">
+                    <a:hueOff val="384618"/>
+                    <a:satOff val="3869"/>
+                    <a:lumOff val="5802"/>
+                  </a:schemeClr>
+                </a:solidFill>
+                <a:latin typeface="Courier"/>
+                <a:ea typeface="Courier"/>
+                <a:cs typeface="Courier"/>
+                <a:sym typeface="Courier"/>
+              </a:rPr>
+              <a:t>#F06</a:t>
+            </a:r>
+            <a:r>
+              <a:rPr dirty="0"/>
+              <a:t> is the same as  </a:t>
+            </a:r>
+            <a:r>
+              <a:rPr b="1" dirty="0">
+                <a:solidFill>
+                  <a:schemeClr val="accent4">
+                    <a:hueOff val="384618"/>
+                    <a:satOff val="3869"/>
+                    <a:lumOff val="5802"/>
+                  </a:schemeClr>
+                </a:solidFill>
+                <a:latin typeface="Courier"/>
+                <a:ea typeface="Courier"/>
+                <a:cs typeface="Courier"/>
+                <a:sym typeface="Courier"/>
+              </a:rPr>
               <a:t>#FF0066</a:t>
             </a:r>
             <a:r>
+              <a:rPr dirty="0"/>
               <a:t>  </a:t>
             </a:r>
           </a:p>
